--- a/BuildingTheUltimateSafetyNetWithIntegrationTests/BuildingTheUltimateSafetyNetWithIntegrationTests.pptx
+++ b/BuildingTheUltimateSafetyNetWithIntegrationTests/BuildingTheUltimateSafetyNetWithIntegrationTests.pptx
@@ -5,7 +5,7 @@
     <p:sldMasterId id="2147483648" r:id="rId1"/>
   </p:sldMasterIdLst>
   <p:notesMasterIdLst>
-    <p:notesMasterId r:id="rId12"/>
+    <p:notesMasterId r:id="rId13"/>
   </p:notesMasterIdLst>
   <p:sldIdLst>
     <p:sldId id="292" r:id="rId2"/>
@@ -17,7 +17,8 @@
     <p:sldId id="299" r:id="rId8"/>
     <p:sldId id="301" r:id="rId9"/>
     <p:sldId id="300" r:id="rId10"/>
-    <p:sldId id="293" r:id="rId11"/>
+    <p:sldId id="302" r:id="rId11"/>
+    <p:sldId id="293" r:id="rId12"/>
   </p:sldIdLst>
   <p:sldSz cx="12192000" cy="6858000"/>
   <p:notesSz cx="6858000" cy="9144000"/>
@@ -6588,7 +6589,7 @@
           <a:p>
             <a:fld id="{DC42B9C4-3265-4C64-80EB-D0107FD08979}" type="slidenum">
               <a:rPr lang="en-US" smtClean="0"/>
-              <a:t>10</a:t>
+              <a:t>11</a:t>
             </a:fld>
             <a:endParaRPr lang="en-US"/>
           </a:p>
@@ -10961,6 +10962,118 @@
 </file>
 
 <file path=ppt/slides/slide10.xml><?xml version="1.0" encoding="utf-8"?>
+<p:sld xmlns:a="http://schemas.openxmlformats.org/drawingml/2006/main" xmlns:r="http://schemas.openxmlformats.org/officeDocument/2006/relationships" xmlns:p="http://schemas.openxmlformats.org/presentationml/2006/main">
+  <p:cSld>
+    <p:spTree>
+      <p:nvGrpSpPr>
+        <p:cNvPr id="1" name=""/>
+        <p:cNvGrpSpPr/>
+        <p:nvPr/>
+      </p:nvGrpSpPr>
+      <p:grpSpPr>
+        <a:xfrm>
+          <a:off x="0" y="0"/>
+          <a:ext cx="0" cy="0"/>
+          <a:chOff x="0" y="0"/>
+          <a:chExt cx="0" cy="0"/>
+        </a:xfrm>
+      </p:grpSpPr>
+      <p:sp>
+        <p:nvSpPr>
+          <p:cNvPr id="2" name="Title 1">
+            <a:extLst>
+              <a:ext uri="{FF2B5EF4-FFF2-40B4-BE49-F238E27FC236}">
+                <a16:creationId xmlns:a16="http://schemas.microsoft.com/office/drawing/2014/main" id="{9D9AD5CF-5CDA-9CAA-DF68-55AD314EDA8F}"/>
+              </a:ext>
+            </a:extLst>
+          </p:cNvPr>
+          <p:cNvSpPr>
+            <a:spLocks noGrp="1"/>
+          </p:cNvSpPr>
+          <p:nvPr>
+            <p:ph type="title"/>
+          </p:nvPr>
+        </p:nvSpPr>
+        <p:spPr/>
+        <p:txBody>
+          <a:bodyPr/>
+          <a:lstStyle/>
+          <a:p>
+            <a:r>
+              <a:rPr lang="en-US" dirty="0"/>
+              <a:t>Demo</a:t>
+            </a:r>
+          </a:p>
+        </p:txBody>
+      </p:sp>
+      <p:sp>
+        <p:nvSpPr>
+          <p:cNvPr id="3" name="Text Placeholder 2">
+            <a:extLst>
+              <a:ext uri="{FF2B5EF4-FFF2-40B4-BE49-F238E27FC236}">
+                <a16:creationId xmlns:a16="http://schemas.microsoft.com/office/drawing/2014/main" id="{8C423515-B38A-4F41-6578-6CD30B0EB1F0}"/>
+              </a:ext>
+            </a:extLst>
+          </p:cNvPr>
+          <p:cNvSpPr>
+            <a:spLocks noGrp="1"/>
+          </p:cNvSpPr>
+          <p:nvPr>
+            <p:ph type="body" idx="1"/>
+          </p:nvPr>
+        </p:nvSpPr>
+        <p:spPr/>
+        <p:txBody>
+          <a:bodyPr/>
+          <a:lstStyle/>
+          <a:p>
+            <a:endParaRPr lang="en-US"/>
+          </a:p>
+        </p:txBody>
+      </p:sp>
+      <p:sp>
+        <p:nvSpPr>
+          <p:cNvPr id="4" name="Date Placeholder 3">
+            <a:extLst>
+              <a:ext uri="{FF2B5EF4-FFF2-40B4-BE49-F238E27FC236}">
+                <a16:creationId xmlns:a16="http://schemas.microsoft.com/office/drawing/2014/main" id="{6BE7F821-8AC8-4969-4AAF-9A0467FE525B}"/>
+              </a:ext>
+            </a:extLst>
+          </p:cNvPr>
+          <p:cNvSpPr>
+            <a:spLocks noGrp="1"/>
+          </p:cNvSpPr>
+          <p:nvPr>
+            <p:ph type="dt" sz="half" idx="10"/>
+          </p:nvPr>
+        </p:nvSpPr>
+        <p:spPr/>
+        <p:txBody>
+          <a:bodyPr/>
+          <a:lstStyle/>
+          <a:p>
+            <a:r>
+              <a:rPr lang="en-US"/>
+              <a:t>@jimmybogard.com</a:t>
+            </a:r>
+            <a:endParaRPr lang="en-US" dirty="0"/>
+          </a:p>
+        </p:txBody>
+      </p:sp>
+    </p:spTree>
+    <p:extLst>
+      <p:ext uri="{BB962C8B-B14F-4D97-AF65-F5344CB8AC3E}">
+        <p14:creationId xmlns:p14="http://schemas.microsoft.com/office/powerpoint/2010/main" val="3906383704"/>
+      </p:ext>
+    </p:extLst>
+  </p:cSld>
+  <p:clrMapOvr>
+    <a:masterClrMapping/>
+  </p:clrMapOvr>
+</p:sld>
+</file>
+
+<file path=ppt/slides/slide11.xml><?xml version="1.0" encoding="utf-8"?>
 <p:sld xmlns:a="http://schemas.openxmlformats.org/drawingml/2006/main" xmlns:r="http://schemas.openxmlformats.org/officeDocument/2006/relationships" xmlns:p="http://schemas.openxmlformats.org/presentationml/2006/main">
   <p:cSld>
     <p:spTree>
@@ -13664,13 +13777,8 @@
           <a:p>
             <a:r>
               <a:rPr lang="en-US" dirty="0"/>
-              <a:t>Match “real-world</a:t>
-            </a:r>
-            <a:r>
-              <a:rPr lang="en-US"/>
-              <a:t>” usage</a:t>
-            </a:r>
-            <a:endParaRPr lang="en-US" dirty="0"/>
+              <a:t>Match “real-world” usage</a:t>
+            </a:r>
           </a:p>
         </p:txBody>
       </p:sp>

--- a/BuildingTheUltimateSafetyNetWithIntegrationTests/BuildingTheUltimateSafetyNetWithIntegrationTests.pptx
+++ b/BuildingTheUltimateSafetyNetWithIntegrationTests/BuildingTheUltimateSafetyNetWithIntegrationTests.pptx
@@ -5,7 +5,7 @@
     <p:sldMasterId id="2147483648" r:id="rId1"/>
   </p:sldMasterIdLst>
   <p:notesMasterIdLst>
-    <p:notesMasterId r:id="rId13"/>
+    <p:notesMasterId r:id="rId14"/>
   </p:notesMasterIdLst>
   <p:sldIdLst>
     <p:sldId id="292" r:id="rId2"/>
@@ -18,7 +18,8 @@
     <p:sldId id="301" r:id="rId9"/>
     <p:sldId id="300" r:id="rId10"/>
     <p:sldId id="302" r:id="rId11"/>
-    <p:sldId id="293" r:id="rId12"/>
+    <p:sldId id="303" r:id="rId12"/>
+    <p:sldId id="293" r:id="rId13"/>
   </p:sldIdLst>
   <p:sldSz cx="12192000" cy="6858000"/>
   <p:notesSz cx="6858000" cy="9144000"/>
@@ -1045,6 +1046,886 @@
 </file>
 
 <file path=ppt/diagrams/colors2.xml><?xml version="1.0" encoding="utf-8"?>
+<dgm:colorsDef xmlns:dgm="http://schemas.openxmlformats.org/drawingml/2006/diagram" xmlns:a="http://schemas.openxmlformats.org/drawingml/2006/main" uniqueId="urn:microsoft.com/office/officeart/2005/8/colors/accent1_5">
+  <dgm:title val=""/>
+  <dgm:desc val=""/>
+  <dgm:catLst>
+    <dgm:cat type="accent1" pri="11500"/>
+  </dgm:catLst>
+  <dgm:styleLbl name="node0">
+    <dgm:fillClrLst meth="cycle">
+      <a:schemeClr val="accent1">
+        <a:alpha val="80000"/>
+      </a:schemeClr>
+    </dgm:fillClrLst>
+    <dgm:linClrLst meth="repeat">
+      <a:schemeClr val="lt1"/>
+    </dgm:linClrLst>
+    <dgm:effectClrLst/>
+    <dgm:txLinClrLst/>
+    <dgm:txFillClrLst/>
+    <dgm:txEffectClrLst/>
+  </dgm:styleLbl>
+  <dgm:styleLbl name="node1">
+    <dgm:fillClrLst>
+      <a:schemeClr val="accent1">
+        <a:alpha val="90000"/>
+      </a:schemeClr>
+      <a:schemeClr val="accent1">
+        <a:alpha val="50000"/>
+      </a:schemeClr>
+    </dgm:fillClrLst>
+    <dgm:linClrLst meth="repeat">
+      <a:schemeClr val="lt1"/>
+    </dgm:linClrLst>
+    <dgm:effectClrLst/>
+    <dgm:txLinClrLst/>
+    <dgm:txFillClrLst/>
+    <dgm:txEffectClrLst/>
+  </dgm:styleLbl>
+  <dgm:styleLbl name="alignNode1">
+    <dgm:fillClrLst>
+      <a:schemeClr val="accent1">
+        <a:alpha val="90000"/>
+      </a:schemeClr>
+      <a:schemeClr val="accent1">
+        <a:alpha val="50000"/>
+      </a:schemeClr>
+    </dgm:fillClrLst>
+    <dgm:linClrLst>
+      <a:schemeClr val="accent1">
+        <a:alpha val="90000"/>
+      </a:schemeClr>
+      <a:schemeClr val="accent1">
+        <a:alpha val="50000"/>
+      </a:schemeClr>
+    </dgm:linClrLst>
+    <dgm:effectClrLst/>
+    <dgm:txLinClrLst/>
+    <dgm:txFillClrLst/>
+    <dgm:txEffectClrLst/>
+  </dgm:styleLbl>
+  <dgm:styleLbl name="lnNode1">
+    <dgm:fillClrLst>
+      <a:schemeClr val="accent1">
+        <a:shade val="90000"/>
+      </a:schemeClr>
+      <a:schemeClr val="accent1">
+        <a:alpha val="50000"/>
+        <a:tint val="50000"/>
+      </a:schemeClr>
+    </dgm:fillClrLst>
+    <dgm:linClrLst meth="repeat">
+      <a:schemeClr val="lt1"/>
+    </dgm:linClrLst>
+    <dgm:effectClrLst/>
+    <dgm:txLinClrLst/>
+    <dgm:txFillClrLst/>
+    <dgm:txEffectClrLst/>
+  </dgm:styleLbl>
+  <dgm:styleLbl name="vennNode1">
+    <dgm:fillClrLst>
+      <a:schemeClr val="accent1">
+        <a:shade val="80000"/>
+        <a:alpha val="50000"/>
+      </a:schemeClr>
+      <a:schemeClr val="accent1">
+        <a:alpha val="80000"/>
+      </a:schemeClr>
+    </dgm:fillClrLst>
+    <dgm:linClrLst meth="repeat">
+      <a:schemeClr val="lt1"/>
+    </dgm:linClrLst>
+    <dgm:effectClrLst/>
+    <dgm:txLinClrLst/>
+    <dgm:txFillClrLst/>
+    <dgm:txEffectClrLst/>
+  </dgm:styleLbl>
+  <dgm:styleLbl name="node2">
+    <dgm:fillClrLst>
+      <a:schemeClr val="accent1">
+        <a:alpha val="70000"/>
+      </a:schemeClr>
+    </dgm:fillClrLst>
+    <dgm:linClrLst meth="repeat">
+      <a:schemeClr val="lt1"/>
+    </dgm:linClrLst>
+    <dgm:effectClrLst/>
+    <dgm:txLinClrLst/>
+    <dgm:txFillClrLst/>
+    <dgm:txEffectClrLst/>
+  </dgm:styleLbl>
+  <dgm:styleLbl name="node3">
+    <dgm:fillClrLst>
+      <a:schemeClr val="accent1">
+        <a:alpha val="50000"/>
+      </a:schemeClr>
+    </dgm:fillClrLst>
+    <dgm:linClrLst meth="repeat">
+      <a:schemeClr val="lt1"/>
+    </dgm:linClrLst>
+    <dgm:effectClrLst/>
+    <dgm:txLinClrLst/>
+    <dgm:txFillClrLst/>
+    <dgm:txEffectClrLst/>
+  </dgm:styleLbl>
+  <dgm:styleLbl name="node4">
+    <dgm:fillClrLst>
+      <a:schemeClr val="accent1">
+        <a:alpha val="30000"/>
+      </a:schemeClr>
+    </dgm:fillClrLst>
+    <dgm:linClrLst meth="repeat">
+      <a:schemeClr val="lt1"/>
+    </dgm:linClrLst>
+    <dgm:effectClrLst/>
+    <dgm:txLinClrLst/>
+    <dgm:txFillClrLst/>
+    <dgm:txEffectClrLst/>
+  </dgm:styleLbl>
+  <dgm:styleLbl name="fgImgPlace1">
+    <dgm:fillClrLst>
+      <a:schemeClr val="accent1">
+        <a:tint val="50000"/>
+        <a:alpha val="90000"/>
+      </a:schemeClr>
+      <a:schemeClr val="accent1">
+        <a:tint val="20000"/>
+        <a:alpha val="50000"/>
+      </a:schemeClr>
+    </dgm:fillClrLst>
+    <dgm:linClrLst meth="repeat">
+      <a:schemeClr val="lt1"/>
+    </dgm:linClrLst>
+    <dgm:effectClrLst/>
+    <dgm:txLinClrLst/>
+    <dgm:txFillClrLst meth="repeat">
+      <a:schemeClr val="lt1"/>
+    </dgm:txFillClrLst>
+    <dgm:txEffectClrLst/>
+  </dgm:styleLbl>
+  <dgm:styleLbl name="alignImgPlace1">
+    <dgm:fillClrLst>
+      <a:schemeClr val="accent1">
+        <a:tint val="50000"/>
+      </a:schemeClr>
+      <a:schemeClr val="accent1">
+        <a:tint val="20000"/>
+      </a:schemeClr>
+    </dgm:fillClrLst>
+    <dgm:linClrLst meth="repeat">
+      <a:schemeClr val="lt1"/>
+    </dgm:linClrLst>
+    <dgm:effectClrLst/>
+    <dgm:txLinClrLst/>
+    <dgm:txFillClrLst meth="repeat">
+      <a:schemeClr val="lt1"/>
+    </dgm:txFillClrLst>
+    <dgm:txEffectClrLst/>
+  </dgm:styleLbl>
+  <dgm:styleLbl name="bgImgPlace1">
+    <dgm:fillClrLst>
+      <a:schemeClr val="accent1">
+        <a:tint val="50000"/>
+      </a:schemeClr>
+      <a:schemeClr val="accent1">
+        <a:tint val="20000"/>
+      </a:schemeClr>
+    </dgm:fillClrLst>
+    <dgm:linClrLst meth="repeat">
+      <a:schemeClr val="lt1"/>
+    </dgm:linClrLst>
+    <dgm:effectClrLst/>
+    <dgm:txLinClrLst/>
+    <dgm:txFillClrLst meth="repeat">
+      <a:schemeClr val="lt1"/>
+    </dgm:txFillClrLst>
+    <dgm:txEffectClrLst/>
+  </dgm:styleLbl>
+  <dgm:styleLbl name="sibTrans2D1">
+    <dgm:fillClrLst>
+      <a:schemeClr val="accent1">
+        <a:shade val="90000"/>
+      </a:schemeClr>
+      <a:schemeClr val="accent1">
+        <a:tint val="50000"/>
+      </a:schemeClr>
+    </dgm:fillClrLst>
+    <dgm:linClrLst>
+      <a:schemeClr val="accent1">
+        <a:shade val="90000"/>
+      </a:schemeClr>
+      <a:schemeClr val="accent1">
+        <a:tint val="50000"/>
+      </a:schemeClr>
+    </dgm:linClrLst>
+    <dgm:effectClrLst/>
+    <dgm:txLinClrLst/>
+    <dgm:txFillClrLst/>
+    <dgm:txEffectClrLst/>
+  </dgm:styleLbl>
+  <dgm:styleLbl name="fgSibTrans2D1">
+    <dgm:fillClrLst>
+      <a:schemeClr val="accent1">
+        <a:shade val="90000"/>
+      </a:schemeClr>
+      <a:schemeClr val="accent1">
+        <a:tint val="50000"/>
+      </a:schemeClr>
+    </dgm:fillClrLst>
+    <dgm:linClrLst>
+      <a:schemeClr val="accent1">
+        <a:shade val="90000"/>
+      </a:schemeClr>
+      <a:schemeClr val="accent1">
+        <a:tint val="50000"/>
+      </a:schemeClr>
+    </dgm:linClrLst>
+    <dgm:effectClrLst/>
+    <dgm:txLinClrLst/>
+    <dgm:txFillClrLst/>
+    <dgm:txEffectClrLst/>
+  </dgm:styleLbl>
+  <dgm:styleLbl name="bgSibTrans2D1">
+    <dgm:fillClrLst>
+      <a:schemeClr val="accent1">
+        <a:shade val="90000"/>
+      </a:schemeClr>
+      <a:schemeClr val="accent1">
+        <a:tint val="50000"/>
+      </a:schemeClr>
+    </dgm:fillClrLst>
+    <dgm:linClrLst>
+      <a:schemeClr val="accent1">
+        <a:shade val="90000"/>
+      </a:schemeClr>
+      <a:schemeClr val="accent1">
+        <a:tint val="50000"/>
+      </a:schemeClr>
+    </dgm:linClrLst>
+    <dgm:effectClrLst/>
+    <dgm:txLinClrLst/>
+    <dgm:txFillClrLst/>
+    <dgm:txEffectClrLst/>
+  </dgm:styleLbl>
+  <dgm:styleLbl name="sibTrans1D1">
+    <dgm:fillClrLst>
+      <a:schemeClr val="accent1">
+        <a:shade val="90000"/>
+      </a:schemeClr>
+      <a:schemeClr val="accent1">
+        <a:tint val="50000"/>
+      </a:schemeClr>
+    </dgm:fillClrLst>
+    <dgm:linClrLst>
+      <a:schemeClr val="accent1">
+        <a:shade val="90000"/>
+      </a:schemeClr>
+      <a:schemeClr val="accent1">
+        <a:tint val="50000"/>
+      </a:schemeClr>
+    </dgm:linClrLst>
+    <dgm:effectClrLst/>
+    <dgm:txLinClrLst/>
+    <dgm:txFillClrLst meth="repeat">
+      <a:schemeClr val="tx1"/>
+    </dgm:txFillClrLst>
+    <dgm:txEffectClrLst/>
+  </dgm:styleLbl>
+  <dgm:styleLbl name="callout">
+    <dgm:fillClrLst meth="repeat">
+      <a:schemeClr val="accent1"/>
+    </dgm:fillClrLst>
+    <dgm:linClrLst meth="repeat">
+      <a:schemeClr val="accent1"/>
+    </dgm:linClrLst>
+    <dgm:effectClrLst/>
+    <dgm:txLinClrLst/>
+    <dgm:txFillClrLst meth="repeat">
+      <a:schemeClr val="tx1"/>
+    </dgm:txFillClrLst>
+    <dgm:txEffectClrLst/>
+  </dgm:styleLbl>
+  <dgm:styleLbl name="asst0">
+    <dgm:fillClrLst meth="repeat">
+      <a:schemeClr val="accent1">
+        <a:alpha val="90000"/>
+      </a:schemeClr>
+    </dgm:fillClrLst>
+    <dgm:linClrLst meth="repeat">
+      <a:schemeClr val="lt1"/>
+    </dgm:linClrLst>
+    <dgm:effectClrLst/>
+    <dgm:txLinClrLst/>
+    <dgm:txFillClrLst/>
+    <dgm:txEffectClrLst/>
+  </dgm:styleLbl>
+  <dgm:styleLbl name="asst1">
+    <dgm:fillClrLst meth="repeat">
+      <a:schemeClr val="accent1">
+        <a:alpha val="90000"/>
+      </a:schemeClr>
+    </dgm:fillClrLst>
+    <dgm:linClrLst meth="repeat">
+      <a:schemeClr val="lt1"/>
+    </dgm:linClrLst>
+    <dgm:effectClrLst/>
+    <dgm:txLinClrLst/>
+    <dgm:txFillClrLst/>
+    <dgm:txEffectClrLst/>
+  </dgm:styleLbl>
+  <dgm:styleLbl name="asst2">
+    <dgm:fillClrLst>
+      <a:schemeClr val="accent1">
+        <a:alpha val="90000"/>
+      </a:schemeClr>
+    </dgm:fillClrLst>
+    <dgm:linClrLst meth="repeat">
+      <a:schemeClr val="lt1"/>
+    </dgm:linClrLst>
+    <dgm:effectClrLst/>
+    <dgm:txLinClrLst/>
+    <dgm:txFillClrLst/>
+    <dgm:txEffectClrLst/>
+  </dgm:styleLbl>
+  <dgm:styleLbl name="asst3">
+    <dgm:fillClrLst>
+      <a:schemeClr val="accent1">
+        <a:alpha val="70000"/>
+      </a:schemeClr>
+    </dgm:fillClrLst>
+    <dgm:linClrLst meth="repeat">
+      <a:schemeClr val="lt1"/>
+    </dgm:linClrLst>
+    <dgm:effectClrLst/>
+    <dgm:txLinClrLst/>
+    <dgm:txFillClrLst/>
+    <dgm:txEffectClrLst/>
+  </dgm:styleLbl>
+  <dgm:styleLbl name="asst4">
+    <dgm:fillClrLst>
+      <a:schemeClr val="accent1">
+        <a:alpha val="50000"/>
+      </a:schemeClr>
+    </dgm:fillClrLst>
+    <dgm:linClrLst meth="repeat">
+      <a:schemeClr val="lt1"/>
+    </dgm:linClrLst>
+    <dgm:effectClrLst/>
+    <dgm:txLinClrLst/>
+    <dgm:txFillClrLst/>
+    <dgm:txEffectClrLst/>
+  </dgm:styleLbl>
+  <dgm:styleLbl name="parChTrans2D1">
+    <dgm:fillClrLst meth="repeat">
+      <a:schemeClr val="accent1">
+        <a:shade val="80000"/>
+      </a:schemeClr>
+    </dgm:fillClrLst>
+    <dgm:linClrLst meth="repeat">
+      <a:schemeClr val="accent1">
+        <a:shade val="80000"/>
+      </a:schemeClr>
+    </dgm:linClrLst>
+    <dgm:effectClrLst/>
+    <dgm:txLinClrLst/>
+    <dgm:txFillClrLst/>
+    <dgm:txEffectClrLst/>
+  </dgm:styleLbl>
+  <dgm:styleLbl name="parChTrans2D2">
+    <dgm:fillClrLst meth="repeat">
+      <a:schemeClr val="accent1">
+        <a:tint val="90000"/>
+      </a:schemeClr>
+    </dgm:fillClrLst>
+    <dgm:linClrLst meth="repeat">
+      <a:schemeClr val="accent1">
+        <a:tint val="90000"/>
+      </a:schemeClr>
+    </dgm:linClrLst>
+    <dgm:effectClrLst/>
+    <dgm:txLinClrLst/>
+    <dgm:txFillClrLst/>
+    <dgm:txEffectClrLst/>
+  </dgm:styleLbl>
+  <dgm:styleLbl name="parChTrans2D3">
+    <dgm:fillClrLst meth="repeat">
+      <a:schemeClr val="accent1">
+        <a:tint val="70000"/>
+      </a:schemeClr>
+    </dgm:fillClrLst>
+    <dgm:linClrLst meth="repeat">
+      <a:schemeClr val="accent1">
+        <a:tint val="70000"/>
+      </a:schemeClr>
+    </dgm:linClrLst>
+    <dgm:effectClrLst/>
+    <dgm:txLinClrLst/>
+    <dgm:txFillClrLst/>
+    <dgm:txEffectClrLst/>
+  </dgm:styleLbl>
+  <dgm:styleLbl name="parChTrans2D4">
+    <dgm:fillClrLst meth="repeat">
+      <a:schemeClr val="accent1">
+        <a:tint val="50000"/>
+      </a:schemeClr>
+    </dgm:fillClrLst>
+    <dgm:linClrLst meth="repeat">
+      <a:schemeClr val="accent1">
+        <a:tint val="50000"/>
+      </a:schemeClr>
+    </dgm:linClrLst>
+    <dgm:effectClrLst/>
+    <dgm:txLinClrLst/>
+    <dgm:txFillClrLst meth="repeat">
+      <a:schemeClr val="dk1"/>
+    </dgm:txFillClrLst>
+    <dgm:txEffectClrLst/>
+  </dgm:styleLbl>
+  <dgm:styleLbl name="parChTrans1D1">
+    <dgm:fillClrLst meth="repeat">
+      <a:schemeClr val="accent1">
+        <a:shade val="80000"/>
+      </a:schemeClr>
+    </dgm:fillClrLst>
+    <dgm:linClrLst meth="repeat">
+      <a:schemeClr val="accent1">
+        <a:shade val="80000"/>
+      </a:schemeClr>
+    </dgm:linClrLst>
+    <dgm:effectClrLst/>
+    <dgm:txLinClrLst/>
+    <dgm:txFillClrLst meth="repeat">
+      <a:schemeClr val="tx1"/>
+    </dgm:txFillClrLst>
+    <dgm:txEffectClrLst/>
+  </dgm:styleLbl>
+  <dgm:styleLbl name="parChTrans1D2">
+    <dgm:fillClrLst meth="repeat">
+      <a:schemeClr val="accent1">
+        <a:tint val="90000"/>
+      </a:schemeClr>
+    </dgm:fillClrLst>
+    <dgm:linClrLst meth="repeat">
+      <a:schemeClr val="accent1">
+        <a:tint val="90000"/>
+      </a:schemeClr>
+    </dgm:linClrLst>
+    <dgm:effectClrLst/>
+    <dgm:txLinClrLst/>
+    <dgm:txFillClrLst meth="repeat">
+      <a:schemeClr val="tx1"/>
+    </dgm:txFillClrLst>
+    <dgm:txEffectClrLst/>
+  </dgm:styleLbl>
+  <dgm:styleLbl name="parChTrans1D3">
+    <dgm:fillClrLst meth="repeat">
+      <a:schemeClr val="accent1">
+        <a:tint val="70000"/>
+      </a:schemeClr>
+    </dgm:fillClrLst>
+    <dgm:linClrLst meth="repeat">
+      <a:schemeClr val="accent1">
+        <a:tint val="70000"/>
+      </a:schemeClr>
+    </dgm:linClrLst>
+    <dgm:effectClrLst/>
+    <dgm:txLinClrLst/>
+    <dgm:txFillClrLst meth="repeat">
+      <a:schemeClr val="tx1"/>
+    </dgm:txFillClrLst>
+    <dgm:txEffectClrLst/>
+  </dgm:styleLbl>
+  <dgm:styleLbl name="parChTrans1D4">
+    <dgm:fillClrLst meth="repeat">
+      <a:schemeClr val="accent1">
+        <a:tint val="50000"/>
+      </a:schemeClr>
+    </dgm:fillClrLst>
+    <dgm:linClrLst meth="repeat">
+      <a:schemeClr val="accent1">
+        <a:tint val="50000"/>
+      </a:schemeClr>
+    </dgm:linClrLst>
+    <dgm:effectClrLst/>
+    <dgm:txLinClrLst/>
+    <dgm:txFillClrLst meth="repeat">
+      <a:schemeClr val="tx1"/>
+    </dgm:txFillClrLst>
+    <dgm:txEffectClrLst/>
+  </dgm:styleLbl>
+  <dgm:styleLbl name="fgAcc1">
+    <dgm:fillClrLst meth="repeat">
+      <a:schemeClr val="lt1">
+        <a:alpha val="90000"/>
+      </a:schemeClr>
+    </dgm:fillClrLst>
+    <dgm:linClrLst>
+      <a:schemeClr val="accent1">
+        <a:alpha val="90000"/>
+      </a:schemeClr>
+      <a:schemeClr val="accent1">
+        <a:alpha val="50000"/>
+      </a:schemeClr>
+    </dgm:linClrLst>
+    <dgm:effectClrLst/>
+    <dgm:txLinClrLst/>
+    <dgm:txFillClrLst meth="repeat">
+      <a:schemeClr val="dk1"/>
+    </dgm:txFillClrLst>
+    <dgm:txEffectClrLst/>
+  </dgm:styleLbl>
+  <dgm:styleLbl name="conFgAcc1">
+    <dgm:fillClrLst meth="repeat">
+      <a:schemeClr val="lt1">
+        <a:alpha val="90000"/>
+      </a:schemeClr>
+    </dgm:fillClrLst>
+    <dgm:linClrLst>
+      <a:schemeClr val="accent1">
+        <a:alpha val="90000"/>
+      </a:schemeClr>
+      <a:schemeClr val="accent1">
+        <a:alpha val="50000"/>
+      </a:schemeClr>
+    </dgm:linClrLst>
+    <dgm:effectClrLst/>
+    <dgm:txLinClrLst/>
+    <dgm:txFillClrLst meth="repeat">
+      <a:schemeClr val="dk1"/>
+    </dgm:txFillClrLst>
+    <dgm:txEffectClrLst/>
+  </dgm:styleLbl>
+  <dgm:styleLbl name="alignAcc1">
+    <dgm:fillClrLst meth="repeat">
+      <a:schemeClr val="lt1">
+        <a:alpha val="90000"/>
+      </a:schemeClr>
+    </dgm:fillClrLst>
+    <dgm:linClrLst>
+      <a:schemeClr val="accent1">
+        <a:alpha val="90000"/>
+      </a:schemeClr>
+      <a:schemeClr val="accent1">
+        <a:alpha val="50000"/>
+      </a:schemeClr>
+    </dgm:linClrLst>
+    <dgm:effectClrLst/>
+    <dgm:txLinClrLst/>
+    <dgm:txFillClrLst meth="repeat">
+      <a:schemeClr val="dk1"/>
+    </dgm:txFillClrLst>
+    <dgm:txEffectClrLst/>
+  </dgm:styleLbl>
+  <dgm:styleLbl name="trAlignAcc1">
+    <dgm:fillClrLst meth="repeat">
+      <a:schemeClr val="lt1">
+        <a:alpha val="40000"/>
+      </a:schemeClr>
+    </dgm:fillClrLst>
+    <dgm:linClrLst>
+      <a:schemeClr val="accent1">
+        <a:alpha val="90000"/>
+      </a:schemeClr>
+      <a:schemeClr val="accent1">
+        <a:alpha val="50000"/>
+      </a:schemeClr>
+    </dgm:linClrLst>
+    <dgm:effectClrLst/>
+    <dgm:txLinClrLst/>
+    <dgm:txFillClrLst meth="repeat">
+      <a:schemeClr val="dk1"/>
+    </dgm:txFillClrLst>
+    <dgm:txEffectClrLst/>
+  </dgm:styleLbl>
+  <dgm:styleLbl name="bgAcc1">
+    <dgm:fillClrLst meth="repeat">
+      <a:schemeClr val="lt1">
+        <a:alpha val="90000"/>
+      </a:schemeClr>
+    </dgm:fillClrLst>
+    <dgm:linClrLst>
+      <a:schemeClr val="accent1">
+        <a:alpha val="90000"/>
+      </a:schemeClr>
+      <a:schemeClr val="accent1">
+        <a:alpha val="50000"/>
+      </a:schemeClr>
+    </dgm:linClrLst>
+    <dgm:effectClrLst/>
+    <dgm:txLinClrLst/>
+    <dgm:txFillClrLst meth="repeat">
+      <a:schemeClr val="dk1"/>
+    </dgm:txFillClrLst>
+    <dgm:txEffectClrLst/>
+  </dgm:styleLbl>
+  <dgm:styleLbl name="solidFgAcc1">
+    <dgm:fillClrLst meth="repeat">
+      <a:schemeClr val="lt1"/>
+    </dgm:fillClrLst>
+    <dgm:linClrLst>
+      <a:schemeClr val="accent1">
+        <a:alpha val="90000"/>
+      </a:schemeClr>
+      <a:schemeClr val="accent1">
+        <a:alpha val="50000"/>
+      </a:schemeClr>
+    </dgm:linClrLst>
+    <dgm:effectClrLst/>
+    <dgm:txLinClrLst/>
+    <dgm:txFillClrLst meth="repeat">
+      <a:schemeClr val="dk1"/>
+    </dgm:txFillClrLst>
+    <dgm:txEffectClrLst/>
+  </dgm:styleLbl>
+  <dgm:styleLbl name="solidAlignAcc1">
+    <dgm:fillClrLst meth="repeat">
+      <a:schemeClr val="lt1"/>
+    </dgm:fillClrLst>
+    <dgm:linClrLst meth="repeat">
+      <a:schemeClr val="accent1"/>
+    </dgm:linClrLst>
+    <dgm:effectClrLst/>
+    <dgm:txLinClrLst/>
+    <dgm:txFillClrLst meth="repeat">
+      <a:schemeClr val="dk1"/>
+    </dgm:txFillClrLst>
+    <dgm:txEffectClrLst/>
+  </dgm:styleLbl>
+  <dgm:styleLbl name="solidBgAcc1">
+    <dgm:fillClrLst meth="repeat">
+      <a:schemeClr val="lt1"/>
+    </dgm:fillClrLst>
+    <dgm:linClrLst meth="repeat">
+      <a:schemeClr val="accent1"/>
+    </dgm:linClrLst>
+    <dgm:effectClrLst/>
+    <dgm:txLinClrLst/>
+    <dgm:txFillClrLst meth="repeat">
+      <a:schemeClr val="dk1"/>
+    </dgm:txFillClrLst>
+    <dgm:txEffectClrLst/>
+  </dgm:styleLbl>
+  <dgm:styleLbl name="fgAccFollowNode1">
+    <dgm:fillClrLst>
+      <a:schemeClr val="accent1">
+        <a:alpha val="90000"/>
+        <a:tint val="40000"/>
+      </a:schemeClr>
+      <a:schemeClr val="accent1">
+        <a:alpha val="50000"/>
+        <a:tint val="40000"/>
+      </a:schemeClr>
+    </dgm:fillClrLst>
+    <dgm:linClrLst meth="repeat">
+      <a:schemeClr val="accent1">
+        <a:alpha val="90000"/>
+        <a:tint val="40000"/>
+      </a:schemeClr>
+    </dgm:linClrLst>
+    <dgm:effectClrLst/>
+    <dgm:txLinClrLst/>
+    <dgm:txFillClrLst meth="repeat">
+      <a:schemeClr val="dk1"/>
+    </dgm:txFillClrLst>
+    <dgm:txEffectClrLst/>
+  </dgm:styleLbl>
+  <dgm:styleLbl name="alignAccFollowNode1">
+    <dgm:fillClrLst meth="repeat">
+      <a:schemeClr val="accent1">
+        <a:alpha val="90000"/>
+        <a:tint val="40000"/>
+      </a:schemeClr>
+    </dgm:fillClrLst>
+    <dgm:linClrLst meth="repeat">
+      <a:schemeClr val="accent1">
+        <a:alpha val="90000"/>
+        <a:tint val="40000"/>
+      </a:schemeClr>
+    </dgm:linClrLst>
+    <dgm:effectClrLst/>
+    <dgm:txLinClrLst/>
+    <dgm:txFillClrLst meth="repeat">
+      <a:schemeClr val="dk1"/>
+    </dgm:txFillClrLst>
+    <dgm:txEffectClrLst/>
+  </dgm:styleLbl>
+  <dgm:styleLbl name="bgAccFollowNode1">
+    <dgm:fillClrLst meth="repeat">
+      <a:schemeClr val="accent1">
+        <a:alpha val="90000"/>
+        <a:tint val="40000"/>
+      </a:schemeClr>
+    </dgm:fillClrLst>
+    <dgm:linClrLst meth="repeat">
+      <a:schemeClr val="lt1"/>
+    </dgm:linClrLst>
+    <dgm:effectClrLst/>
+    <dgm:txLinClrLst/>
+    <dgm:txFillClrLst meth="repeat">
+      <a:schemeClr val="dk1"/>
+    </dgm:txFillClrLst>
+    <dgm:txEffectClrLst/>
+  </dgm:styleLbl>
+  <dgm:styleLbl name="fgAcc0">
+    <dgm:fillClrLst meth="repeat">
+      <a:schemeClr val="lt1">
+        <a:alpha val="90000"/>
+      </a:schemeClr>
+    </dgm:fillClrLst>
+    <dgm:linClrLst meth="repeat">
+      <a:schemeClr val="accent1">
+        <a:shade val="80000"/>
+      </a:schemeClr>
+    </dgm:linClrLst>
+    <dgm:effectClrLst/>
+    <dgm:txLinClrLst/>
+    <dgm:txFillClrLst meth="repeat">
+      <a:schemeClr val="dk1"/>
+    </dgm:txFillClrLst>
+    <dgm:txEffectClrLst/>
+  </dgm:styleLbl>
+  <dgm:styleLbl name="fgAcc2">
+    <dgm:fillClrLst meth="repeat">
+      <a:schemeClr val="lt1">
+        <a:alpha val="90000"/>
+      </a:schemeClr>
+    </dgm:fillClrLst>
+    <dgm:linClrLst meth="repeat">
+      <a:schemeClr val="accent1">
+        <a:tint val="90000"/>
+      </a:schemeClr>
+    </dgm:linClrLst>
+    <dgm:effectClrLst/>
+    <dgm:txLinClrLst/>
+    <dgm:txFillClrLst meth="repeat">
+      <a:schemeClr val="dk1"/>
+    </dgm:txFillClrLst>
+    <dgm:txEffectClrLst/>
+  </dgm:styleLbl>
+  <dgm:styleLbl name="fgAcc3">
+    <dgm:fillClrLst meth="repeat">
+      <a:schemeClr val="lt1">
+        <a:alpha val="90000"/>
+      </a:schemeClr>
+    </dgm:fillClrLst>
+    <dgm:linClrLst meth="repeat">
+      <a:schemeClr val="accent1">
+        <a:tint val="70000"/>
+      </a:schemeClr>
+    </dgm:linClrLst>
+    <dgm:effectClrLst/>
+    <dgm:txLinClrLst/>
+    <dgm:txFillClrLst meth="repeat">
+      <a:schemeClr val="dk1"/>
+    </dgm:txFillClrLst>
+    <dgm:txEffectClrLst/>
+  </dgm:styleLbl>
+  <dgm:styleLbl name="fgAcc4">
+    <dgm:fillClrLst meth="repeat">
+      <a:schemeClr val="lt1">
+        <a:alpha val="90000"/>
+      </a:schemeClr>
+    </dgm:fillClrLst>
+    <dgm:linClrLst meth="repeat">
+      <a:schemeClr val="accent1">
+        <a:tint val="50000"/>
+      </a:schemeClr>
+    </dgm:linClrLst>
+    <dgm:effectClrLst/>
+    <dgm:txLinClrLst/>
+    <dgm:txFillClrLst meth="repeat">
+      <a:schemeClr val="dk1"/>
+    </dgm:txFillClrLst>
+    <dgm:txEffectClrLst/>
+  </dgm:styleLbl>
+  <dgm:styleLbl name="bgShp">
+    <dgm:fillClrLst meth="repeat">
+      <a:schemeClr val="accent1">
+        <a:tint val="40000"/>
+      </a:schemeClr>
+    </dgm:fillClrLst>
+    <dgm:linClrLst meth="repeat">
+      <a:schemeClr val="dk1"/>
+    </dgm:linClrLst>
+    <dgm:effectClrLst/>
+    <dgm:txLinClrLst/>
+    <dgm:txFillClrLst meth="repeat">
+      <a:schemeClr val="dk1"/>
+    </dgm:txFillClrLst>
+    <dgm:txEffectClrLst/>
+  </dgm:styleLbl>
+  <dgm:styleLbl name="dkBgShp">
+    <dgm:fillClrLst meth="repeat">
+      <a:schemeClr val="accent1">
+        <a:shade val="90000"/>
+      </a:schemeClr>
+    </dgm:fillClrLst>
+    <dgm:linClrLst meth="repeat">
+      <a:schemeClr val="dk1"/>
+    </dgm:linClrLst>
+    <dgm:effectClrLst/>
+    <dgm:txLinClrLst/>
+    <dgm:txFillClrLst meth="repeat">
+      <a:schemeClr val="lt1"/>
+    </dgm:txFillClrLst>
+    <dgm:txEffectClrLst/>
+  </dgm:styleLbl>
+  <dgm:styleLbl name="trBgShp">
+    <dgm:fillClrLst meth="repeat">
+      <a:schemeClr val="accent1">
+        <a:tint val="50000"/>
+        <a:alpha val="40000"/>
+      </a:schemeClr>
+    </dgm:fillClrLst>
+    <dgm:linClrLst meth="repeat">
+      <a:schemeClr val="accent1"/>
+    </dgm:linClrLst>
+    <dgm:effectClrLst/>
+    <dgm:txLinClrLst/>
+    <dgm:txFillClrLst meth="repeat">
+      <a:schemeClr val="lt1"/>
+    </dgm:txFillClrLst>
+    <dgm:txEffectClrLst/>
+  </dgm:styleLbl>
+  <dgm:styleLbl name="fgShp">
+    <dgm:fillClrLst meth="repeat">
+      <a:schemeClr val="accent1">
+        <a:tint val="40000"/>
+      </a:schemeClr>
+    </dgm:fillClrLst>
+    <dgm:linClrLst meth="repeat">
+      <a:schemeClr val="lt1"/>
+    </dgm:linClrLst>
+    <dgm:effectClrLst/>
+    <dgm:txLinClrLst/>
+    <dgm:txFillClrLst meth="repeat">
+      <a:schemeClr val="dk1"/>
+    </dgm:txFillClrLst>
+    <dgm:txEffectClrLst/>
+  </dgm:styleLbl>
+  <dgm:styleLbl name="revTx">
+    <dgm:fillClrLst meth="repeat">
+      <a:schemeClr val="lt1">
+        <a:alpha val="0"/>
+      </a:schemeClr>
+    </dgm:fillClrLst>
+    <dgm:linClrLst meth="repeat">
+      <a:schemeClr val="dk1">
+        <a:alpha val="0"/>
+      </a:schemeClr>
+    </dgm:linClrLst>
+    <dgm:effectClrLst/>
+    <dgm:txLinClrLst/>
+    <dgm:txFillClrLst meth="repeat">
+      <a:schemeClr val="tx1"/>
+    </dgm:txFillClrLst>
+    <dgm:txEffectClrLst/>
+  </dgm:styleLbl>
+</dgm:colorsDef>
+</file>
+
+<file path=ppt/diagrams/colors3.xml><?xml version="1.0" encoding="utf-8"?>
 <dgm:colorsDef xmlns:dgm="http://schemas.openxmlformats.org/drawingml/2006/diagram" xmlns:a="http://schemas.openxmlformats.org/drawingml/2006/main" uniqueId="urn:microsoft.com/office/officeart/2005/8/colors/accent1_5">
   <dgm:title val=""/>
   <dgm:desc val=""/>
@@ -2297,6 +3178,229 @@
 </file>
 
 <file path=ppt/diagrams/data2.xml><?xml version="1.0" encoding="utf-8"?>
+<dgm:dataModel xmlns:dgm="http://schemas.openxmlformats.org/drawingml/2006/diagram" xmlns:a="http://schemas.openxmlformats.org/drawingml/2006/main">
+  <dgm:ptLst>
+    <dgm:pt modelId="{648399D7-12A9-1647-98D8-1261301617BE}" type="doc">
+      <dgm:prSet loTypeId="urn:microsoft.com/office/officeart/2005/8/layout/pyramid1" loCatId="" qsTypeId="urn:microsoft.com/office/officeart/2005/8/quickstyle/simple1" qsCatId="simple" csTypeId="urn:microsoft.com/office/officeart/2005/8/colors/accent1_5" csCatId="accent1" phldr="1"/>
+      <dgm:spPr/>
+    </dgm:pt>
+    <dgm:pt modelId="{A4ABED75-F7E4-B045-859D-3A0478A1E538}">
+      <dgm:prSet phldrT="[Text]"/>
+      <dgm:spPr/>
+      <dgm:t>
+        <a:bodyPr/>
+        <a:lstStyle/>
+        <a:p>
+          <a:r>
+            <a:rPr lang="en-US" dirty="0"/>
+            <a:t>UI</a:t>
+          </a:r>
+        </a:p>
+      </dgm:t>
+    </dgm:pt>
+    <dgm:pt modelId="{706E24FC-ED64-2440-A08E-DE73F8ED95E5}" type="parTrans" cxnId="{C50E19F2-0BE2-FF45-8958-9C57B259E665}">
+      <dgm:prSet/>
+      <dgm:spPr/>
+      <dgm:t>
+        <a:bodyPr/>
+        <a:lstStyle/>
+        <a:p>
+          <a:endParaRPr lang="en-US"/>
+        </a:p>
+      </dgm:t>
+    </dgm:pt>
+    <dgm:pt modelId="{AD6F1F77-3D01-3C46-A161-CABBD049E346}" type="sibTrans" cxnId="{C50E19F2-0BE2-FF45-8958-9C57B259E665}">
+      <dgm:prSet/>
+      <dgm:spPr/>
+      <dgm:t>
+        <a:bodyPr/>
+        <a:lstStyle/>
+        <a:p>
+          <a:endParaRPr lang="en-US"/>
+        </a:p>
+      </dgm:t>
+    </dgm:pt>
+    <dgm:pt modelId="{CFCE2821-7921-1242-9C57-3E53CCF2C1E6}">
+      <dgm:prSet phldrT="[Text]"/>
+      <dgm:spPr/>
+      <dgm:t>
+        <a:bodyPr/>
+        <a:lstStyle/>
+        <a:p>
+          <a:r>
+            <a:rPr lang="en-US" dirty="0"/>
+            <a:t>Integration</a:t>
+          </a:r>
+        </a:p>
+      </dgm:t>
+    </dgm:pt>
+    <dgm:pt modelId="{3E0BD6CF-7C06-9C49-A1F7-6D82FCF9C88A}" type="parTrans" cxnId="{16C8E293-3F81-5A47-8B5F-110838BFF107}">
+      <dgm:prSet/>
+      <dgm:spPr/>
+      <dgm:t>
+        <a:bodyPr/>
+        <a:lstStyle/>
+        <a:p>
+          <a:endParaRPr lang="en-US"/>
+        </a:p>
+      </dgm:t>
+    </dgm:pt>
+    <dgm:pt modelId="{73DA138F-C127-C44D-B7B0-EA9D4FB0D1EB}" type="sibTrans" cxnId="{16C8E293-3F81-5A47-8B5F-110838BFF107}">
+      <dgm:prSet/>
+      <dgm:spPr/>
+      <dgm:t>
+        <a:bodyPr/>
+        <a:lstStyle/>
+        <a:p>
+          <a:endParaRPr lang="en-US"/>
+        </a:p>
+      </dgm:t>
+    </dgm:pt>
+    <dgm:pt modelId="{D799C958-9958-DF4D-AC0E-2C304CFC6EA4}">
+      <dgm:prSet phldrT="[Text]"/>
+      <dgm:spPr/>
+      <dgm:t>
+        <a:bodyPr/>
+        <a:lstStyle/>
+        <a:p>
+          <a:r>
+            <a:rPr lang="en-US" dirty="0"/>
+            <a:t>Unit</a:t>
+          </a:r>
+        </a:p>
+      </dgm:t>
+    </dgm:pt>
+    <dgm:pt modelId="{813B8C7A-13C2-A54A-94AE-C6F855B8FE55}" type="parTrans" cxnId="{5DD63F79-896C-CC4D-97C8-A41CCC821EC3}">
+      <dgm:prSet/>
+      <dgm:spPr/>
+      <dgm:t>
+        <a:bodyPr/>
+        <a:lstStyle/>
+        <a:p>
+          <a:endParaRPr lang="en-US"/>
+        </a:p>
+      </dgm:t>
+    </dgm:pt>
+    <dgm:pt modelId="{EE3121B6-4925-D949-9954-B10D23CE4485}" type="sibTrans" cxnId="{5DD63F79-896C-CC4D-97C8-A41CCC821EC3}">
+      <dgm:prSet/>
+      <dgm:spPr/>
+      <dgm:t>
+        <a:bodyPr/>
+        <a:lstStyle/>
+        <a:p>
+          <a:endParaRPr lang="en-US"/>
+        </a:p>
+      </dgm:t>
+    </dgm:pt>
+    <dgm:pt modelId="{D879B94F-5226-D247-ACB1-6195745EF3AC}" type="pres">
+      <dgm:prSet presAssocID="{648399D7-12A9-1647-98D8-1261301617BE}" presName="Name0" presStyleCnt="0">
+        <dgm:presLayoutVars>
+          <dgm:dir/>
+          <dgm:animLvl val="lvl"/>
+          <dgm:resizeHandles val="exact"/>
+        </dgm:presLayoutVars>
+      </dgm:prSet>
+      <dgm:spPr/>
+    </dgm:pt>
+    <dgm:pt modelId="{1D9195F5-DD6F-2D4C-B15A-AD971111F3A1}" type="pres">
+      <dgm:prSet presAssocID="{A4ABED75-F7E4-B045-859D-3A0478A1E538}" presName="Name8" presStyleCnt="0"/>
+      <dgm:spPr/>
+    </dgm:pt>
+    <dgm:pt modelId="{0DA2742F-3657-334C-91B0-C09422D102A0}" type="pres">
+      <dgm:prSet presAssocID="{A4ABED75-F7E4-B045-859D-3A0478A1E538}" presName="level" presStyleLbl="node1" presStyleIdx="0" presStyleCnt="3">
+        <dgm:presLayoutVars>
+          <dgm:chMax val="1"/>
+          <dgm:bulletEnabled val="1"/>
+        </dgm:presLayoutVars>
+      </dgm:prSet>
+      <dgm:spPr/>
+    </dgm:pt>
+    <dgm:pt modelId="{A5AA2348-48E5-F647-A2F7-24BFCD43C1AF}" type="pres">
+      <dgm:prSet presAssocID="{A4ABED75-F7E4-B045-859D-3A0478A1E538}" presName="levelTx" presStyleLbl="revTx" presStyleIdx="0" presStyleCnt="0">
+        <dgm:presLayoutVars>
+          <dgm:chMax val="1"/>
+          <dgm:bulletEnabled val="1"/>
+        </dgm:presLayoutVars>
+      </dgm:prSet>
+      <dgm:spPr/>
+    </dgm:pt>
+    <dgm:pt modelId="{50D55E02-AD37-074D-A684-F5954083E6F1}" type="pres">
+      <dgm:prSet presAssocID="{CFCE2821-7921-1242-9C57-3E53CCF2C1E6}" presName="Name8" presStyleCnt="0"/>
+      <dgm:spPr/>
+    </dgm:pt>
+    <dgm:pt modelId="{E0BE5782-C6BD-5D49-A60F-E68DF625A98E}" type="pres">
+      <dgm:prSet presAssocID="{CFCE2821-7921-1242-9C57-3E53CCF2C1E6}" presName="level" presStyleLbl="node1" presStyleIdx="1" presStyleCnt="3">
+        <dgm:presLayoutVars>
+          <dgm:chMax val="1"/>
+          <dgm:bulletEnabled val="1"/>
+        </dgm:presLayoutVars>
+      </dgm:prSet>
+      <dgm:spPr/>
+    </dgm:pt>
+    <dgm:pt modelId="{6615CAAF-8E7A-3348-8809-CE39514A46BF}" type="pres">
+      <dgm:prSet presAssocID="{CFCE2821-7921-1242-9C57-3E53CCF2C1E6}" presName="levelTx" presStyleLbl="revTx" presStyleIdx="0" presStyleCnt="0">
+        <dgm:presLayoutVars>
+          <dgm:chMax val="1"/>
+          <dgm:bulletEnabled val="1"/>
+        </dgm:presLayoutVars>
+      </dgm:prSet>
+      <dgm:spPr/>
+    </dgm:pt>
+    <dgm:pt modelId="{343C92B8-CDF7-8044-A79E-3E51DFE177A7}" type="pres">
+      <dgm:prSet presAssocID="{D799C958-9958-DF4D-AC0E-2C304CFC6EA4}" presName="Name8" presStyleCnt="0"/>
+      <dgm:spPr/>
+    </dgm:pt>
+    <dgm:pt modelId="{D99F6F25-CF5E-8241-9EA4-2E4DC785C6A1}" type="pres">
+      <dgm:prSet presAssocID="{D799C958-9958-DF4D-AC0E-2C304CFC6EA4}" presName="level" presStyleLbl="node1" presStyleIdx="2" presStyleCnt="3">
+        <dgm:presLayoutVars>
+          <dgm:chMax val="1"/>
+          <dgm:bulletEnabled val="1"/>
+        </dgm:presLayoutVars>
+      </dgm:prSet>
+      <dgm:spPr/>
+    </dgm:pt>
+    <dgm:pt modelId="{3116C8B5-E85F-C947-B4F8-8CFC8299D7FA}" type="pres">
+      <dgm:prSet presAssocID="{D799C958-9958-DF4D-AC0E-2C304CFC6EA4}" presName="levelTx" presStyleLbl="revTx" presStyleIdx="0" presStyleCnt="0">
+        <dgm:presLayoutVars>
+          <dgm:chMax val="1"/>
+          <dgm:bulletEnabled val="1"/>
+        </dgm:presLayoutVars>
+      </dgm:prSet>
+      <dgm:spPr/>
+    </dgm:pt>
+  </dgm:ptLst>
+  <dgm:cxnLst>
+    <dgm:cxn modelId="{E31C0261-383A-AE48-BA82-A559041433B1}" type="presOf" srcId="{D799C958-9958-DF4D-AC0E-2C304CFC6EA4}" destId="{3116C8B5-E85F-C947-B4F8-8CFC8299D7FA}" srcOrd="1" destOrd="0" presId="urn:microsoft.com/office/officeart/2005/8/layout/pyramid1"/>
+    <dgm:cxn modelId="{B95B6A62-A86F-8740-B13D-141BBE9EC8EC}" type="presOf" srcId="{CFCE2821-7921-1242-9C57-3E53CCF2C1E6}" destId="{6615CAAF-8E7A-3348-8809-CE39514A46BF}" srcOrd="1" destOrd="0" presId="urn:microsoft.com/office/officeart/2005/8/layout/pyramid1"/>
+    <dgm:cxn modelId="{5DD63F79-896C-CC4D-97C8-A41CCC821EC3}" srcId="{648399D7-12A9-1647-98D8-1261301617BE}" destId="{D799C958-9958-DF4D-AC0E-2C304CFC6EA4}" srcOrd="2" destOrd="0" parTransId="{813B8C7A-13C2-A54A-94AE-C6F855B8FE55}" sibTransId="{EE3121B6-4925-D949-9954-B10D23CE4485}"/>
+    <dgm:cxn modelId="{15F8E47D-E62B-5144-B220-1B989CA802BC}" type="presOf" srcId="{648399D7-12A9-1647-98D8-1261301617BE}" destId="{D879B94F-5226-D247-ACB1-6195745EF3AC}" srcOrd="0" destOrd="0" presId="urn:microsoft.com/office/officeart/2005/8/layout/pyramid1"/>
+    <dgm:cxn modelId="{8EB1C290-0929-064B-917B-B279FDC3F82D}" type="presOf" srcId="{A4ABED75-F7E4-B045-859D-3A0478A1E538}" destId="{0DA2742F-3657-334C-91B0-C09422D102A0}" srcOrd="0" destOrd="0" presId="urn:microsoft.com/office/officeart/2005/8/layout/pyramid1"/>
+    <dgm:cxn modelId="{16C8E293-3F81-5A47-8B5F-110838BFF107}" srcId="{648399D7-12A9-1647-98D8-1261301617BE}" destId="{CFCE2821-7921-1242-9C57-3E53CCF2C1E6}" srcOrd="1" destOrd="0" parTransId="{3E0BD6CF-7C06-9C49-A1F7-6D82FCF9C88A}" sibTransId="{73DA138F-C127-C44D-B7B0-EA9D4FB0D1EB}"/>
+    <dgm:cxn modelId="{97474DA6-E027-E942-9627-D3CFE6A5F0D9}" type="presOf" srcId="{A4ABED75-F7E4-B045-859D-3A0478A1E538}" destId="{A5AA2348-48E5-F647-A2F7-24BFCD43C1AF}" srcOrd="1" destOrd="0" presId="urn:microsoft.com/office/officeart/2005/8/layout/pyramid1"/>
+    <dgm:cxn modelId="{7AEA53AA-808A-6D43-8F8B-4F93AAC2A729}" type="presOf" srcId="{D799C958-9958-DF4D-AC0E-2C304CFC6EA4}" destId="{D99F6F25-CF5E-8241-9EA4-2E4DC785C6A1}" srcOrd="0" destOrd="0" presId="urn:microsoft.com/office/officeart/2005/8/layout/pyramid1"/>
+    <dgm:cxn modelId="{519920DF-A308-594D-BBC6-4DBE51113F7A}" type="presOf" srcId="{CFCE2821-7921-1242-9C57-3E53CCF2C1E6}" destId="{E0BE5782-C6BD-5D49-A60F-E68DF625A98E}" srcOrd="0" destOrd="0" presId="urn:microsoft.com/office/officeart/2005/8/layout/pyramid1"/>
+    <dgm:cxn modelId="{C50E19F2-0BE2-FF45-8958-9C57B259E665}" srcId="{648399D7-12A9-1647-98D8-1261301617BE}" destId="{A4ABED75-F7E4-B045-859D-3A0478A1E538}" srcOrd="0" destOrd="0" parTransId="{706E24FC-ED64-2440-A08E-DE73F8ED95E5}" sibTransId="{AD6F1F77-3D01-3C46-A161-CABBD049E346}"/>
+    <dgm:cxn modelId="{E7591649-0645-BC4E-A5B1-451063FD3109}" type="presParOf" srcId="{D879B94F-5226-D247-ACB1-6195745EF3AC}" destId="{1D9195F5-DD6F-2D4C-B15A-AD971111F3A1}" srcOrd="0" destOrd="0" presId="urn:microsoft.com/office/officeart/2005/8/layout/pyramid1"/>
+    <dgm:cxn modelId="{CFFDF8AE-D636-4C47-A980-00E10DD9349C}" type="presParOf" srcId="{1D9195F5-DD6F-2D4C-B15A-AD971111F3A1}" destId="{0DA2742F-3657-334C-91B0-C09422D102A0}" srcOrd="0" destOrd="0" presId="urn:microsoft.com/office/officeart/2005/8/layout/pyramid1"/>
+    <dgm:cxn modelId="{58FFB3C7-5D9A-8F4C-BC4F-84E5B5A4C048}" type="presParOf" srcId="{1D9195F5-DD6F-2D4C-B15A-AD971111F3A1}" destId="{A5AA2348-48E5-F647-A2F7-24BFCD43C1AF}" srcOrd="1" destOrd="0" presId="urn:microsoft.com/office/officeart/2005/8/layout/pyramid1"/>
+    <dgm:cxn modelId="{9E9DC06E-535F-384C-B7EF-67A03022B0CB}" type="presParOf" srcId="{D879B94F-5226-D247-ACB1-6195745EF3AC}" destId="{50D55E02-AD37-074D-A684-F5954083E6F1}" srcOrd="1" destOrd="0" presId="urn:microsoft.com/office/officeart/2005/8/layout/pyramid1"/>
+    <dgm:cxn modelId="{76ED820F-9E76-7C40-B89E-FD216361B1E6}" type="presParOf" srcId="{50D55E02-AD37-074D-A684-F5954083E6F1}" destId="{E0BE5782-C6BD-5D49-A60F-E68DF625A98E}" srcOrd="0" destOrd="0" presId="urn:microsoft.com/office/officeart/2005/8/layout/pyramid1"/>
+    <dgm:cxn modelId="{7645C8EF-75D2-174F-9F3D-11ECAF9D89FF}" type="presParOf" srcId="{50D55E02-AD37-074D-A684-F5954083E6F1}" destId="{6615CAAF-8E7A-3348-8809-CE39514A46BF}" srcOrd="1" destOrd="0" presId="urn:microsoft.com/office/officeart/2005/8/layout/pyramid1"/>
+    <dgm:cxn modelId="{AD06BDE5-EAA4-EE4E-93D6-86A319B51A8E}" type="presParOf" srcId="{D879B94F-5226-D247-ACB1-6195745EF3AC}" destId="{343C92B8-CDF7-8044-A79E-3E51DFE177A7}" srcOrd="2" destOrd="0" presId="urn:microsoft.com/office/officeart/2005/8/layout/pyramid1"/>
+    <dgm:cxn modelId="{E8930E72-5F81-AE46-8007-F8D8B75CA13F}" type="presParOf" srcId="{343C92B8-CDF7-8044-A79E-3E51DFE177A7}" destId="{D99F6F25-CF5E-8241-9EA4-2E4DC785C6A1}" srcOrd="0" destOrd="0" presId="urn:microsoft.com/office/officeart/2005/8/layout/pyramid1"/>
+    <dgm:cxn modelId="{35FB0CB5-BA87-9745-802D-F9F4BEFBCC67}" type="presParOf" srcId="{343C92B8-CDF7-8044-A79E-3E51DFE177A7}" destId="{3116C8B5-E85F-C947-B4F8-8CFC8299D7FA}" srcOrd="1" destOrd="0" presId="urn:microsoft.com/office/officeart/2005/8/layout/pyramid1"/>
+  </dgm:cxnLst>
+  <dgm:bg/>
+  <dgm:whole/>
+  <dgm:extLst>
+    <a:ext uri="http://schemas.microsoft.com/office/drawing/2008/diagram">
+      <dsp:dataModelExt xmlns:dsp="http://schemas.microsoft.com/office/drawing/2008/diagram" relId="rId6" minVer="http://schemas.openxmlformats.org/drawingml/2006/diagram"/>
+    </a:ext>
+  </dgm:extLst>
+</dgm:dataModel>
+</file>
+
+<file path=ppt/diagrams/data3.xml><?xml version="1.0" encoding="utf-8"?>
 <dgm:dataModel xmlns:dgm="http://schemas.openxmlformats.org/drawingml/2006/diagram" xmlns:a="http://schemas.openxmlformats.org/drawingml/2006/main">
   <dgm:ptLst>
     <dgm:pt modelId="{648399D7-12A9-1647-98D8-1261301617BE}" type="doc">
@@ -3611,6 +4715,261 @@
 </dsp:drawing>
 </file>
 
+<file path=ppt/diagrams/drawing3.xml><?xml version="1.0" encoding="utf-8"?>
+<dsp:drawing xmlns:dgm="http://schemas.openxmlformats.org/drawingml/2006/diagram" xmlns:dsp="http://schemas.microsoft.com/office/drawing/2008/diagram" xmlns:a="http://schemas.openxmlformats.org/drawingml/2006/main">
+  <dsp:spTree>
+    <dsp:nvGrpSpPr>
+      <dsp:cNvPr id="0" name=""/>
+      <dsp:cNvGrpSpPr/>
+    </dsp:nvGrpSpPr>
+    <dsp:grpSpPr/>
+    <dsp:sp modelId="{0DA2742F-3657-334C-91B0-C09422D102A0}">
+      <dsp:nvSpPr>
+        <dsp:cNvPr id="0" name=""/>
+        <dsp:cNvSpPr/>
+      </dsp:nvSpPr>
+      <dsp:spPr>
+        <a:xfrm>
+          <a:off x="1539788" y="0"/>
+          <a:ext cx="1539788" cy="1076160"/>
+        </a:xfrm>
+        <a:prstGeom prst="trapezoid">
+          <a:avLst>
+            <a:gd name="adj" fmla="val 71541"/>
+          </a:avLst>
+        </a:prstGeom>
+        <a:solidFill>
+          <a:schemeClr val="accent1">
+            <a:alpha val="90000"/>
+            <a:hueOff val="0"/>
+            <a:satOff val="0"/>
+            <a:lumOff val="0"/>
+            <a:alphaOff val="0"/>
+          </a:schemeClr>
+        </a:solidFill>
+        <a:ln w="12700" cap="flat" cmpd="sng" algn="ctr">
+          <a:solidFill>
+            <a:schemeClr val="lt1">
+              <a:hueOff val="0"/>
+              <a:satOff val="0"/>
+              <a:lumOff val="0"/>
+              <a:alphaOff val="0"/>
+            </a:schemeClr>
+          </a:solidFill>
+          <a:prstDash val="solid"/>
+          <a:miter lim="800000"/>
+        </a:ln>
+        <a:effectLst/>
+      </dsp:spPr>
+      <dsp:style>
+        <a:lnRef idx="2">
+          <a:scrgbClr r="0" g="0" b="0"/>
+        </a:lnRef>
+        <a:fillRef idx="1">
+          <a:scrgbClr r="0" g="0" b="0"/>
+        </a:fillRef>
+        <a:effectRef idx="0">
+          <a:scrgbClr r="0" g="0" b="0"/>
+        </a:effectRef>
+        <a:fontRef idx="minor">
+          <a:schemeClr val="lt1"/>
+        </a:fontRef>
+      </dsp:style>
+      <dsp:txBody>
+        <a:bodyPr spcFirstLastPara="0" vert="horz" wrap="square" lIns="29210" tIns="29210" rIns="29210" bIns="29210" numCol="1" spcCol="1270" anchor="ctr" anchorCtr="0">
+          <a:noAutofit/>
+        </a:bodyPr>
+        <a:lstStyle/>
+        <a:p>
+          <a:pPr marL="0" lvl="0" indent="0" algn="ctr" defTabSz="1022350">
+            <a:lnSpc>
+              <a:spcPct val="90000"/>
+            </a:lnSpc>
+            <a:spcBef>
+              <a:spcPct val="0"/>
+            </a:spcBef>
+            <a:spcAft>
+              <a:spcPct val="35000"/>
+            </a:spcAft>
+            <a:buNone/>
+          </a:pPr>
+          <a:r>
+            <a:rPr lang="en-US" sz="2300" kern="1200" dirty="0"/>
+            <a:t>UI</a:t>
+          </a:r>
+        </a:p>
+      </dsp:txBody>
+      <dsp:txXfrm>
+        <a:off x="1539788" y="0"/>
+        <a:ext cx="1539788" cy="1076160"/>
+      </dsp:txXfrm>
+    </dsp:sp>
+    <dsp:sp modelId="{E0BE5782-C6BD-5D49-A60F-E68DF625A98E}">
+      <dsp:nvSpPr>
+        <dsp:cNvPr id="0" name=""/>
+        <dsp:cNvSpPr/>
+      </dsp:nvSpPr>
+      <dsp:spPr>
+        <a:xfrm>
+          <a:off x="769894" y="1076160"/>
+          <a:ext cx="3079577" cy="1076160"/>
+        </a:xfrm>
+        <a:prstGeom prst="trapezoid">
+          <a:avLst>
+            <a:gd name="adj" fmla="val 71541"/>
+          </a:avLst>
+        </a:prstGeom>
+        <a:solidFill>
+          <a:schemeClr val="accent1">
+            <a:alpha val="90000"/>
+            <a:hueOff val="0"/>
+            <a:satOff val="0"/>
+            <a:lumOff val="0"/>
+            <a:alphaOff val="-20000"/>
+          </a:schemeClr>
+        </a:solidFill>
+        <a:ln w="12700" cap="flat" cmpd="sng" algn="ctr">
+          <a:solidFill>
+            <a:schemeClr val="lt1">
+              <a:hueOff val="0"/>
+              <a:satOff val="0"/>
+              <a:lumOff val="0"/>
+              <a:alphaOff val="0"/>
+            </a:schemeClr>
+          </a:solidFill>
+          <a:prstDash val="solid"/>
+          <a:miter lim="800000"/>
+        </a:ln>
+        <a:effectLst/>
+      </dsp:spPr>
+      <dsp:style>
+        <a:lnRef idx="2">
+          <a:scrgbClr r="0" g="0" b="0"/>
+        </a:lnRef>
+        <a:fillRef idx="1">
+          <a:scrgbClr r="0" g="0" b="0"/>
+        </a:fillRef>
+        <a:effectRef idx="0">
+          <a:scrgbClr r="0" g="0" b="0"/>
+        </a:effectRef>
+        <a:fontRef idx="minor">
+          <a:schemeClr val="lt1"/>
+        </a:fontRef>
+      </dsp:style>
+      <dsp:txBody>
+        <a:bodyPr spcFirstLastPara="0" vert="horz" wrap="square" lIns="29210" tIns="29210" rIns="29210" bIns="29210" numCol="1" spcCol="1270" anchor="ctr" anchorCtr="0">
+          <a:noAutofit/>
+        </a:bodyPr>
+        <a:lstStyle/>
+        <a:p>
+          <a:pPr marL="0" lvl="0" indent="0" algn="ctr" defTabSz="1022350">
+            <a:lnSpc>
+              <a:spcPct val="90000"/>
+            </a:lnSpc>
+            <a:spcBef>
+              <a:spcPct val="0"/>
+            </a:spcBef>
+            <a:spcAft>
+              <a:spcPct val="35000"/>
+            </a:spcAft>
+            <a:buNone/>
+          </a:pPr>
+          <a:r>
+            <a:rPr lang="en-US" sz="2300" kern="1200" dirty="0"/>
+            <a:t>Integration</a:t>
+          </a:r>
+        </a:p>
+      </dsp:txBody>
+      <dsp:txXfrm>
+        <a:off x="1308820" y="1076160"/>
+        <a:ext cx="2001725" cy="1076160"/>
+      </dsp:txXfrm>
+    </dsp:sp>
+    <dsp:sp modelId="{D99F6F25-CF5E-8241-9EA4-2E4DC785C6A1}">
+      <dsp:nvSpPr>
+        <dsp:cNvPr id="0" name=""/>
+        <dsp:cNvSpPr/>
+      </dsp:nvSpPr>
+      <dsp:spPr>
+        <a:xfrm>
+          <a:off x="0" y="2152321"/>
+          <a:ext cx="4619366" cy="1076160"/>
+        </a:xfrm>
+        <a:prstGeom prst="trapezoid">
+          <a:avLst>
+            <a:gd name="adj" fmla="val 71541"/>
+          </a:avLst>
+        </a:prstGeom>
+        <a:solidFill>
+          <a:schemeClr val="accent1">
+            <a:alpha val="90000"/>
+            <a:hueOff val="0"/>
+            <a:satOff val="0"/>
+            <a:lumOff val="0"/>
+            <a:alphaOff val="-40000"/>
+          </a:schemeClr>
+        </a:solidFill>
+        <a:ln w="12700" cap="flat" cmpd="sng" algn="ctr">
+          <a:solidFill>
+            <a:schemeClr val="lt1">
+              <a:hueOff val="0"/>
+              <a:satOff val="0"/>
+              <a:lumOff val="0"/>
+              <a:alphaOff val="0"/>
+            </a:schemeClr>
+          </a:solidFill>
+          <a:prstDash val="solid"/>
+          <a:miter lim="800000"/>
+        </a:ln>
+        <a:effectLst/>
+      </dsp:spPr>
+      <dsp:style>
+        <a:lnRef idx="2">
+          <a:scrgbClr r="0" g="0" b="0"/>
+        </a:lnRef>
+        <a:fillRef idx="1">
+          <a:scrgbClr r="0" g="0" b="0"/>
+        </a:fillRef>
+        <a:effectRef idx="0">
+          <a:scrgbClr r="0" g="0" b="0"/>
+        </a:effectRef>
+        <a:fontRef idx="minor">
+          <a:schemeClr val="lt1"/>
+        </a:fontRef>
+      </dsp:style>
+      <dsp:txBody>
+        <a:bodyPr spcFirstLastPara="0" vert="horz" wrap="square" lIns="29210" tIns="29210" rIns="29210" bIns="29210" numCol="1" spcCol="1270" anchor="ctr" anchorCtr="0">
+          <a:noAutofit/>
+        </a:bodyPr>
+        <a:lstStyle/>
+        <a:p>
+          <a:pPr marL="0" lvl="0" indent="0" algn="ctr" defTabSz="1022350">
+            <a:lnSpc>
+              <a:spcPct val="90000"/>
+            </a:lnSpc>
+            <a:spcBef>
+              <a:spcPct val="0"/>
+            </a:spcBef>
+            <a:spcAft>
+              <a:spcPct val="35000"/>
+            </a:spcAft>
+            <a:buNone/>
+          </a:pPr>
+          <a:r>
+            <a:rPr lang="en-US" sz="2300" kern="1200" dirty="0"/>
+            <a:t>Unit</a:t>
+          </a:r>
+        </a:p>
+      </dsp:txBody>
+      <dsp:txXfrm>
+        <a:off x="808389" y="2152321"/>
+        <a:ext cx="3002587" cy="1076160"/>
+      </dsp:txXfrm>
+    </dsp:sp>
+  </dsp:spTree>
+</dsp:drawing>
+</file>
+
 <file path=ppt/diagrams/layout1.xml><?xml version="1.0" encoding="utf-8"?>
 <dgm:layoutDef xmlns:dgm="http://schemas.openxmlformats.org/drawingml/2006/diagram" xmlns:a="http://schemas.openxmlformats.org/drawingml/2006/main" uniqueId="urn:microsoft.com/office/officeart/2005/8/layout/process1">
   <dgm:title val=""/>
@@ -3989,6 +5348,238 @@
 </dgm:layoutDef>
 </file>
 
+<file path=ppt/diagrams/layout3.xml><?xml version="1.0" encoding="utf-8"?>
+<dgm:layoutDef xmlns:dgm="http://schemas.openxmlformats.org/drawingml/2006/diagram" xmlns:a="http://schemas.openxmlformats.org/drawingml/2006/main" uniqueId="urn:microsoft.com/office/officeart/2005/8/layout/pyramid1">
+  <dgm:title val=""/>
+  <dgm:desc val=""/>
+  <dgm:catLst>
+    <dgm:cat type="pyramid" pri="1000"/>
+  </dgm:catLst>
+  <dgm:sampData useDef="1">
+    <dgm:dataModel>
+      <dgm:ptLst/>
+      <dgm:bg/>
+      <dgm:whole/>
+    </dgm:dataModel>
+  </dgm:sampData>
+  <dgm:styleData>
+    <dgm:dataModel>
+      <dgm:ptLst>
+        <dgm:pt modelId="0" type="doc"/>
+        <dgm:pt modelId="1"/>
+        <dgm:pt modelId="2"/>
+      </dgm:ptLst>
+      <dgm:cxnLst>
+        <dgm:cxn modelId="3" srcId="0" destId="1" srcOrd="0" destOrd="0"/>
+        <dgm:cxn modelId="4" srcId="0" destId="2" srcOrd="1" destOrd="0"/>
+      </dgm:cxnLst>
+      <dgm:bg/>
+      <dgm:whole/>
+    </dgm:dataModel>
+  </dgm:styleData>
+  <dgm:clrData>
+    <dgm:dataModel>
+      <dgm:ptLst>
+        <dgm:pt modelId="0" type="doc"/>
+        <dgm:pt modelId="1"/>
+        <dgm:pt modelId="2"/>
+        <dgm:pt modelId="3"/>
+        <dgm:pt modelId="4"/>
+      </dgm:ptLst>
+      <dgm:cxnLst>
+        <dgm:cxn modelId="5" srcId="0" destId="1" srcOrd="0" destOrd="0"/>
+        <dgm:cxn modelId="6" srcId="0" destId="2" srcOrd="1" destOrd="0"/>
+        <dgm:cxn modelId="7" srcId="0" destId="3" srcOrd="2" destOrd="0"/>
+        <dgm:cxn modelId="8" srcId="0" destId="4" srcOrd="3" destOrd="0"/>
+      </dgm:cxnLst>
+      <dgm:bg/>
+      <dgm:whole/>
+    </dgm:dataModel>
+  </dgm:clrData>
+  <dgm:layoutNode name="Name0">
+    <dgm:varLst>
+      <dgm:dir/>
+      <dgm:animLvl val="lvl"/>
+      <dgm:resizeHandles val="exact"/>
+    </dgm:varLst>
+    <dgm:choose name="Name1">
+      <dgm:if name="Name2" func="var" arg="dir" op="equ" val="norm">
+        <dgm:alg type="pyra">
+          <dgm:param type="linDir" val="fromB"/>
+          <dgm:param type="txDir" val="fromT"/>
+          <dgm:param type="pyraAcctPos" val="aft"/>
+          <dgm:param type="pyraAcctTxMar" val="step"/>
+          <dgm:param type="pyraAcctBkgdNode" val="acctBkgd"/>
+          <dgm:param type="pyraAcctTxNode" val="acctTx"/>
+          <dgm:param type="pyraLvlNode" val="level"/>
+        </dgm:alg>
+      </dgm:if>
+      <dgm:else name="Name3">
+        <dgm:alg type="pyra">
+          <dgm:param type="linDir" val="fromB"/>
+          <dgm:param type="txDir" val="fromT"/>
+          <dgm:param type="pyraAcctPos" val="bef"/>
+          <dgm:param type="pyraAcctTxMar" val="step"/>
+          <dgm:param type="pyraAcctBkgdNode" val="acctBkgd"/>
+          <dgm:param type="pyraAcctTxNode" val="acctTx"/>
+          <dgm:param type="pyraLvlNode" val="level"/>
+        </dgm:alg>
+      </dgm:else>
+    </dgm:choose>
+    <dgm:shape xmlns:r="http://schemas.openxmlformats.org/officeDocument/2006/relationships" r:blip="">
+      <dgm:adjLst/>
+    </dgm:shape>
+    <dgm:presOf/>
+    <dgm:choose name="Name4">
+      <dgm:if name="Name5" axis="root des" ptType="all node" func="maxDepth" op="gte" val="2">
+        <dgm:constrLst>
+          <dgm:constr type="primFontSz" for="des" forName="levelTx" op="equ"/>
+          <dgm:constr type="secFontSz" for="des" forName="acctTx" op="equ"/>
+          <dgm:constr type="pyraAcctRatio" val="0.32"/>
+        </dgm:constrLst>
+      </dgm:if>
+      <dgm:else name="Name6">
+        <dgm:constrLst>
+          <dgm:constr type="primFontSz" for="des" forName="levelTx" op="equ"/>
+          <dgm:constr type="secFontSz" for="des" forName="acctTx" op="equ"/>
+          <dgm:constr type="pyraAcctRatio"/>
+        </dgm:constrLst>
+      </dgm:else>
+    </dgm:choose>
+    <dgm:ruleLst/>
+    <dgm:forEach name="Name7" axis="ch" ptType="node">
+      <dgm:layoutNode name="Name8">
+        <dgm:alg type="composite">
+          <dgm:param type="horzAlign" val="none"/>
+        </dgm:alg>
+        <dgm:shape xmlns:r="http://schemas.openxmlformats.org/officeDocument/2006/relationships" r:blip="">
+          <dgm:adjLst/>
+        </dgm:shape>
+        <dgm:presOf/>
+        <dgm:choose name="Name9">
+          <dgm:if name="Name10" axis="self" ptType="node" func="pos" op="equ" val="1">
+            <dgm:constrLst>
+              <dgm:constr type="ctrX" for="ch" forName="acctBkgd" val="1"/>
+              <dgm:constr type="ctrY" for="ch" forName="acctBkgd" val="1"/>
+              <dgm:constr type="w" for="ch" forName="acctBkgd" val="1"/>
+              <dgm:constr type="h" for="ch" forName="acctBkgd" val="1"/>
+              <dgm:constr type="ctrX" for="ch" forName="acctTx" val="1"/>
+              <dgm:constr type="ctrY" for="ch" forName="acctTx" val="1"/>
+              <dgm:constr type="w" for="ch" forName="acctTx" val="1"/>
+              <dgm:constr type="h" for="ch" forName="acctTx" val="1"/>
+              <dgm:constr type="ctrX" for="ch" forName="level" val="1"/>
+              <dgm:constr type="ctrY" for="ch" forName="level" val="1"/>
+              <dgm:constr type="w" for="ch" forName="level" val="1"/>
+              <dgm:constr type="h" for="ch" forName="level" val="1"/>
+              <dgm:constr type="ctrX" for="ch" forName="levelTx" refType="ctrX" refFor="ch" refForName="level"/>
+              <dgm:constr type="ctrY" for="ch" forName="levelTx" refType="ctrY" refFor="ch" refForName="level"/>
+              <dgm:constr type="w" for="ch" forName="levelTx" refType="w" refFor="ch" refForName="level"/>
+              <dgm:constr type="h" for="ch" forName="levelTx" refType="h" refFor="ch" refForName="level"/>
+            </dgm:constrLst>
+          </dgm:if>
+          <dgm:else name="Name11">
+            <dgm:constrLst>
+              <dgm:constr type="ctrX" for="ch" forName="acctBkgd" val="1"/>
+              <dgm:constr type="ctrY" for="ch" forName="acctBkgd" val="1"/>
+              <dgm:constr type="w" for="ch" forName="acctBkgd" val="1"/>
+              <dgm:constr type="h" for="ch" forName="acctBkgd" val="1"/>
+              <dgm:constr type="ctrX" for="ch" forName="acctTx" val="1"/>
+              <dgm:constr type="ctrY" for="ch" forName="acctTx" val="1"/>
+              <dgm:constr type="w" for="ch" forName="acctTx" val="1"/>
+              <dgm:constr type="h" for="ch" forName="acctTx" val="1"/>
+              <dgm:constr type="ctrX" for="ch" forName="level" val="1"/>
+              <dgm:constr type="ctrY" for="ch" forName="level" val="1"/>
+              <dgm:constr type="w" for="ch" forName="level" val="1"/>
+              <dgm:constr type="h" for="ch" forName="level" val="1"/>
+              <dgm:constr type="ctrX" for="ch" forName="levelTx" refType="ctrX" refFor="ch" refForName="level"/>
+              <dgm:constr type="ctrY" for="ch" forName="levelTx" refType="ctrY" refFor="ch" refForName="level"/>
+              <dgm:constr type="w" for="ch" forName="levelTx" refType="w" refFor="ch" refForName="level" fact="0.65"/>
+              <dgm:constr type="h" for="ch" forName="levelTx" refType="h" refFor="ch" refForName="level"/>
+            </dgm:constrLst>
+          </dgm:else>
+        </dgm:choose>
+        <dgm:ruleLst/>
+        <dgm:choose name="Name12">
+          <dgm:if name="Name13" axis="ch" ptType="node" func="cnt" op="gte" val="1">
+            <dgm:layoutNode name="acctBkgd" styleLbl="alignAcc1">
+              <dgm:alg type="sp"/>
+              <dgm:shape xmlns:r="http://schemas.openxmlformats.org/officeDocument/2006/relationships" type="nonIsoscelesTrapezoid" r:blip="">
+                <dgm:adjLst/>
+              </dgm:shape>
+              <dgm:presOf axis="des" ptType="node"/>
+              <dgm:constrLst/>
+              <dgm:ruleLst/>
+            </dgm:layoutNode>
+            <dgm:layoutNode name="acctTx" styleLbl="alignAcc1">
+              <dgm:varLst>
+                <dgm:bulletEnabled val="1"/>
+              </dgm:varLst>
+              <dgm:alg type="tx">
+                <dgm:param type="stBulletLvl" val="1"/>
+                <dgm:param type="txAnchorVertCh" val="mid"/>
+              </dgm:alg>
+              <dgm:shape xmlns:r="http://schemas.openxmlformats.org/officeDocument/2006/relationships" type="nonIsoscelesTrapezoid" r:blip="" hideGeom="1">
+                <dgm:adjLst/>
+              </dgm:shape>
+              <dgm:presOf axis="des" ptType="node"/>
+              <dgm:constrLst>
+                <dgm:constr type="secFontSz" val="65"/>
+                <dgm:constr type="primFontSz" refType="secFontSz"/>
+                <dgm:constr type="tMarg" refType="secFontSz" fact="0.3"/>
+                <dgm:constr type="bMarg" refType="secFontSz" fact="0.3"/>
+                <dgm:constr type="lMarg" refType="secFontSz" fact="0.3"/>
+                <dgm:constr type="rMarg" refType="secFontSz" fact="0.3"/>
+              </dgm:constrLst>
+              <dgm:ruleLst>
+                <dgm:rule type="secFontSz" val="5" fact="NaN" max="NaN"/>
+              </dgm:ruleLst>
+            </dgm:layoutNode>
+          </dgm:if>
+          <dgm:else name="Name14"/>
+        </dgm:choose>
+        <dgm:layoutNode name="level">
+          <dgm:varLst>
+            <dgm:chMax val="1"/>
+            <dgm:bulletEnabled val="1"/>
+          </dgm:varLst>
+          <dgm:alg type="sp"/>
+          <dgm:shape xmlns:r="http://schemas.openxmlformats.org/officeDocument/2006/relationships" type="trapezoid" r:blip="">
+            <dgm:adjLst/>
+          </dgm:shape>
+          <dgm:presOf axis="self"/>
+          <dgm:constrLst>
+            <dgm:constr type="h" val="500"/>
+            <dgm:constr type="w" val="1"/>
+          </dgm:constrLst>
+          <dgm:ruleLst/>
+        </dgm:layoutNode>
+        <dgm:layoutNode name="levelTx" styleLbl="revTx">
+          <dgm:varLst>
+            <dgm:chMax val="1"/>
+            <dgm:bulletEnabled val="1"/>
+          </dgm:varLst>
+          <dgm:alg type="tx"/>
+          <dgm:shape xmlns:r="http://schemas.openxmlformats.org/officeDocument/2006/relationships" type="rect" r:blip="" hideGeom="1">
+            <dgm:adjLst/>
+          </dgm:shape>
+          <dgm:presOf axis="self"/>
+          <dgm:constrLst>
+            <dgm:constr type="tMarg" refType="primFontSz" fact="0.1"/>
+            <dgm:constr type="bMarg" refType="primFontSz" fact="0.1"/>
+            <dgm:constr type="lMarg" refType="primFontSz" fact="0.1"/>
+            <dgm:constr type="rMarg" refType="primFontSz" fact="0.1"/>
+            <dgm:constr type="primFontSz" val="65"/>
+          </dgm:constrLst>
+          <dgm:ruleLst>
+            <dgm:rule type="primFontSz" val="5" fact="NaN" max="NaN"/>
+          </dgm:ruleLst>
+        </dgm:layoutNode>
+      </dgm:layoutNode>
+    </dgm:forEach>
+  </dgm:layoutNode>
+</dgm:layoutDef>
+</file>
+
 <file path=ppt/diagrams/quickStyle1.xml><?xml version="1.0" encoding="utf-8"?>
 <dgm:styleDef xmlns:dgm="http://schemas.openxmlformats.org/drawingml/2006/diagram" xmlns:a="http://schemas.openxmlformats.org/drawingml/2006/main" uniqueId="urn:microsoft.com/office/officeart/2005/8/quickstyle/simple1">
   <dgm:title val=""/>
@@ -5024,6 +6615,1040 @@
 </file>
 
 <file path=ppt/diagrams/quickStyle2.xml><?xml version="1.0" encoding="utf-8"?>
+<dgm:styleDef xmlns:dgm="http://schemas.openxmlformats.org/drawingml/2006/diagram" xmlns:a="http://schemas.openxmlformats.org/drawingml/2006/main" uniqueId="urn:microsoft.com/office/officeart/2005/8/quickstyle/simple1">
+  <dgm:title val=""/>
+  <dgm:desc val=""/>
+  <dgm:catLst>
+    <dgm:cat type="simple" pri="10100"/>
+  </dgm:catLst>
+  <dgm:scene3d>
+    <a:camera prst="orthographicFront"/>
+    <a:lightRig rig="threePt" dir="t"/>
+  </dgm:scene3d>
+  <dgm:styleLbl name="node0">
+    <dgm:scene3d>
+      <a:camera prst="orthographicFront"/>
+      <a:lightRig rig="threePt" dir="t"/>
+    </dgm:scene3d>
+    <dgm:sp3d/>
+    <dgm:txPr/>
+    <dgm:style>
+      <a:lnRef idx="2">
+        <a:scrgbClr r="0" g="0" b="0"/>
+      </a:lnRef>
+      <a:fillRef idx="1">
+        <a:scrgbClr r="0" g="0" b="0"/>
+      </a:fillRef>
+      <a:effectRef idx="0">
+        <a:scrgbClr r="0" g="0" b="0"/>
+      </a:effectRef>
+      <a:fontRef idx="minor">
+        <a:schemeClr val="lt1"/>
+      </a:fontRef>
+    </dgm:style>
+  </dgm:styleLbl>
+  <dgm:styleLbl name="lnNode1">
+    <dgm:scene3d>
+      <a:camera prst="orthographicFront"/>
+      <a:lightRig rig="threePt" dir="t"/>
+    </dgm:scene3d>
+    <dgm:sp3d/>
+    <dgm:txPr/>
+    <dgm:style>
+      <a:lnRef idx="2">
+        <a:scrgbClr r="0" g="0" b="0"/>
+      </a:lnRef>
+      <a:fillRef idx="1">
+        <a:scrgbClr r="0" g="0" b="0"/>
+      </a:fillRef>
+      <a:effectRef idx="0">
+        <a:scrgbClr r="0" g="0" b="0"/>
+      </a:effectRef>
+      <a:fontRef idx="minor">
+        <a:schemeClr val="lt1"/>
+      </a:fontRef>
+    </dgm:style>
+  </dgm:styleLbl>
+  <dgm:styleLbl name="vennNode1">
+    <dgm:scene3d>
+      <a:camera prst="orthographicFront"/>
+      <a:lightRig rig="threePt" dir="t"/>
+    </dgm:scene3d>
+    <dgm:sp3d/>
+    <dgm:txPr/>
+    <dgm:style>
+      <a:lnRef idx="2">
+        <a:scrgbClr r="0" g="0" b="0"/>
+      </a:lnRef>
+      <a:fillRef idx="1">
+        <a:scrgbClr r="0" g="0" b="0"/>
+      </a:fillRef>
+      <a:effectRef idx="0">
+        <a:scrgbClr r="0" g="0" b="0"/>
+      </a:effectRef>
+      <a:fontRef idx="minor">
+        <a:schemeClr val="tx1"/>
+      </a:fontRef>
+    </dgm:style>
+  </dgm:styleLbl>
+  <dgm:styleLbl name="alignNode1">
+    <dgm:scene3d>
+      <a:camera prst="orthographicFront"/>
+      <a:lightRig rig="threePt" dir="t"/>
+    </dgm:scene3d>
+    <dgm:sp3d/>
+    <dgm:txPr/>
+    <dgm:style>
+      <a:lnRef idx="2">
+        <a:scrgbClr r="0" g="0" b="0"/>
+      </a:lnRef>
+      <a:fillRef idx="1">
+        <a:scrgbClr r="0" g="0" b="0"/>
+      </a:fillRef>
+      <a:effectRef idx="0">
+        <a:scrgbClr r="0" g="0" b="0"/>
+      </a:effectRef>
+      <a:fontRef idx="minor">
+        <a:schemeClr val="lt1"/>
+      </a:fontRef>
+    </dgm:style>
+  </dgm:styleLbl>
+  <dgm:styleLbl name="node1">
+    <dgm:scene3d>
+      <a:camera prst="orthographicFront"/>
+      <a:lightRig rig="threePt" dir="t"/>
+    </dgm:scene3d>
+    <dgm:sp3d/>
+    <dgm:txPr/>
+    <dgm:style>
+      <a:lnRef idx="2">
+        <a:scrgbClr r="0" g="0" b="0"/>
+      </a:lnRef>
+      <a:fillRef idx="1">
+        <a:scrgbClr r="0" g="0" b="0"/>
+      </a:fillRef>
+      <a:effectRef idx="0">
+        <a:scrgbClr r="0" g="0" b="0"/>
+      </a:effectRef>
+      <a:fontRef idx="minor">
+        <a:schemeClr val="lt1"/>
+      </a:fontRef>
+    </dgm:style>
+  </dgm:styleLbl>
+  <dgm:styleLbl name="node2">
+    <dgm:scene3d>
+      <a:camera prst="orthographicFront"/>
+      <a:lightRig rig="threePt" dir="t"/>
+    </dgm:scene3d>
+    <dgm:sp3d/>
+    <dgm:txPr/>
+    <dgm:style>
+      <a:lnRef idx="2">
+        <a:scrgbClr r="0" g="0" b="0"/>
+      </a:lnRef>
+      <a:fillRef idx="1">
+        <a:scrgbClr r="0" g="0" b="0"/>
+      </a:fillRef>
+      <a:effectRef idx="0">
+        <a:scrgbClr r="0" g="0" b="0"/>
+      </a:effectRef>
+      <a:fontRef idx="minor">
+        <a:schemeClr val="lt1"/>
+      </a:fontRef>
+    </dgm:style>
+  </dgm:styleLbl>
+  <dgm:styleLbl name="node3">
+    <dgm:scene3d>
+      <a:camera prst="orthographicFront"/>
+      <a:lightRig rig="threePt" dir="t"/>
+    </dgm:scene3d>
+    <dgm:sp3d/>
+    <dgm:txPr/>
+    <dgm:style>
+      <a:lnRef idx="2">
+        <a:scrgbClr r="0" g="0" b="0"/>
+      </a:lnRef>
+      <a:fillRef idx="1">
+        <a:scrgbClr r="0" g="0" b="0"/>
+      </a:fillRef>
+      <a:effectRef idx="0">
+        <a:scrgbClr r="0" g="0" b="0"/>
+      </a:effectRef>
+      <a:fontRef idx="minor">
+        <a:schemeClr val="lt1"/>
+      </a:fontRef>
+    </dgm:style>
+  </dgm:styleLbl>
+  <dgm:styleLbl name="node4">
+    <dgm:scene3d>
+      <a:camera prst="orthographicFront"/>
+      <a:lightRig rig="threePt" dir="t"/>
+    </dgm:scene3d>
+    <dgm:sp3d/>
+    <dgm:txPr/>
+    <dgm:style>
+      <a:lnRef idx="2">
+        <a:scrgbClr r="0" g="0" b="0"/>
+      </a:lnRef>
+      <a:fillRef idx="1">
+        <a:scrgbClr r="0" g="0" b="0"/>
+      </a:fillRef>
+      <a:effectRef idx="0">
+        <a:scrgbClr r="0" g="0" b="0"/>
+      </a:effectRef>
+      <a:fontRef idx="minor">
+        <a:schemeClr val="lt1"/>
+      </a:fontRef>
+    </dgm:style>
+  </dgm:styleLbl>
+  <dgm:styleLbl name="fgImgPlace1">
+    <dgm:scene3d>
+      <a:camera prst="orthographicFront"/>
+      <a:lightRig rig="threePt" dir="t"/>
+    </dgm:scene3d>
+    <dgm:sp3d/>
+    <dgm:txPr/>
+    <dgm:style>
+      <a:lnRef idx="2">
+        <a:scrgbClr r="0" g="0" b="0"/>
+      </a:lnRef>
+      <a:fillRef idx="1">
+        <a:scrgbClr r="0" g="0" b="0"/>
+      </a:fillRef>
+      <a:effectRef idx="0">
+        <a:scrgbClr r="0" g="0" b="0"/>
+      </a:effectRef>
+      <a:fontRef idx="minor"/>
+    </dgm:style>
+  </dgm:styleLbl>
+  <dgm:styleLbl name="alignImgPlace1">
+    <dgm:scene3d>
+      <a:camera prst="orthographicFront"/>
+      <a:lightRig rig="threePt" dir="t"/>
+    </dgm:scene3d>
+    <dgm:sp3d/>
+    <dgm:txPr/>
+    <dgm:style>
+      <a:lnRef idx="2">
+        <a:scrgbClr r="0" g="0" b="0"/>
+      </a:lnRef>
+      <a:fillRef idx="1">
+        <a:scrgbClr r="0" g="0" b="0"/>
+      </a:fillRef>
+      <a:effectRef idx="0">
+        <a:scrgbClr r="0" g="0" b="0"/>
+      </a:effectRef>
+      <a:fontRef idx="minor"/>
+    </dgm:style>
+  </dgm:styleLbl>
+  <dgm:styleLbl name="bgImgPlace1">
+    <dgm:scene3d>
+      <a:camera prst="orthographicFront"/>
+      <a:lightRig rig="threePt" dir="t"/>
+    </dgm:scene3d>
+    <dgm:sp3d/>
+    <dgm:txPr/>
+    <dgm:style>
+      <a:lnRef idx="2">
+        <a:scrgbClr r="0" g="0" b="0"/>
+      </a:lnRef>
+      <a:fillRef idx="1">
+        <a:scrgbClr r="0" g="0" b="0"/>
+      </a:fillRef>
+      <a:effectRef idx="0">
+        <a:scrgbClr r="0" g="0" b="0"/>
+      </a:effectRef>
+      <a:fontRef idx="minor"/>
+    </dgm:style>
+  </dgm:styleLbl>
+  <dgm:styleLbl name="sibTrans2D1">
+    <dgm:scene3d>
+      <a:camera prst="orthographicFront"/>
+      <a:lightRig rig="threePt" dir="t"/>
+    </dgm:scene3d>
+    <dgm:sp3d/>
+    <dgm:txPr/>
+    <dgm:style>
+      <a:lnRef idx="0">
+        <a:scrgbClr r="0" g="0" b="0"/>
+      </a:lnRef>
+      <a:fillRef idx="1">
+        <a:scrgbClr r="0" g="0" b="0"/>
+      </a:fillRef>
+      <a:effectRef idx="0">
+        <a:scrgbClr r="0" g="0" b="0"/>
+      </a:effectRef>
+      <a:fontRef idx="minor">
+        <a:schemeClr val="lt1"/>
+      </a:fontRef>
+    </dgm:style>
+  </dgm:styleLbl>
+  <dgm:styleLbl name="fgSibTrans2D1">
+    <dgm:scene3d>
+      <a:camera prst="orthographicFront"/>
+      <a:lightRig rig="threePt" dir="t"/>
+    </dgm:scene3d>
+    <dgm:sp3d/>
+    <dgm:txPr/>
+    <dgm:style>
+      <a:lnRef idx="0">
+        <a:scrgbClr r="0" g="0" b="0"/>
+      </a:lnRef>
+      <a:fillRef idx="1">
+        <a:scrgbClr r="0" g="0" b="0"/>
+      </a:fillRef>
+      <a:effectRef idx="0">
+        <a:scrgbClr r="0" g="0" b="0"/>
+      </a:effectRef>
+      <a:fontRef idx="minor">
+        <a:schemeClr val="lt1"/>
+      </a:fontRef>
+    </dgm:style>
+  </dgm:styleLbl>
+  <dgm:styleLbl name="bgSibTrans2D1">
+    <dgm:scene3d>
+      <a:camera prst="orthographicFront"/>
+      <a:lightRig rig="threePt" dir="t"/>
+    </dgm:scene3d>
+    <dgm:sp3d/>
+    <dgm:txPr/>
+    <dgm:style>
+      <a:lnRef idx="0">
+        <a:scrgbClr r="0" g="0" b="0"/>
+      </a:lnRef>
+      <a:fillRef idx="1">
+        <a:scrgbClr r="0" g="0" b="0"/>
+      </a:fillRef>
+      <a:effectRef idx="0">
+        <a:scrgbClr r="0" g="0" b="0"/>
+      </a:effectRef>
+      <a:fontRef idx="minor">
+        <a:schemeClr val="lt1"/>
+      </a:fontRef>
+    </dgm:style>
+  </dgm:styleLbl>
+  <dgm:styleLbl name="sibTrans1D1">
+    <dgm:scene3d>
+      <a:camera prst="orthographicFront"/>
+      <a:lightRig rig="threePt" dir="t"/>
+    </dgm:scene3d>
+    <dgm:sp3d/>
+    <dgm:txPr/>
+    <dgm:style>
+      <a:lnRef idx="1">
+        <a:scrgbClr r="0" g="0" b="0"/>
+      </a:lnRef>
+      <a:fillRef idx="0">
+        <a:scrgbClr r="0" g="0" b="0"/>
+      </a:fillRef>
+      <a:effectRef idx="0">
+        <a:scrgbClr r="0" g="0" b="0"/>
+      </a:effectRef>
+      <a:fontRef idx="minor"/>
+    </dgm:style>
+  </dgm:styleLbl>
+  <dgm:styleLbl name="callout">
+    <dgm:scene3d>
+      <a:camera prst="orthographicFront"/>
+      <a:lightRig rig="threePt" dir="t"/>
+    </dgm:scene3d>
+    <dgm:sp3d/>
+    <dgm:txPr/>
+    <dgm:style>
+      <a:lnRef idx="2">
+        <a:scrgbClr r="0" g="0" b="0"/>
+      </a:lnRef>
+      <a:fillRef idx="1">
+        <a:scrgbClr r="0" g="0" b="0"/>
+      </a:fillRef>
+      <a:effectRef idx="0">
+        <a:scrgbClr r="0" g="0" b="0"/>
+      </a:effectRef>
+      <a:fontRef idx="minor"/>
+    </dgm:style>
+  </dgm:styleLbl>
+  <dgm:styleLbl name="asst0">
+    <dgm:scene3d>
+      <a:camera prst="orthographicFront"/>
+      <a:lightRig rig="threePt" dir="t"/>
+    </dgm:scene3d>
+    <dgm:sp3d/>
+    <dgm:txPr/>
+    <dgm:style>
+      <a:lnRef idx="2">
+        <a:scrgbClr r="0" g="0" b="0"/>
+      </a:lnRef>
+      <a:fillRef idx="1">
+        <a:scrgbClr r="0" g="0" b="0"/>
+      </a:fillRef>
+      <a:effectRef idx="0">
+        <a:scrgbClr r="0" g="0" b="0"/>
+      </a:effectRef>
+      <a:fontRef idx="minor">
+        <a:schemeClr val="lt1"/>
+      </a:fontRef>
+    </dgm:style>
+  </dgm:styleLbl>
+  <dgm:styleLbl name="asst1">
+    <dgm:scene3d>
+      <a:camera prst="orthographicFront"/>
+      <a:lightRig rig="threePt" dir="t"/>
+    </dgm:scene3d>
+    <dgm:sp3d/>
+    <dgm:txPr/>
+    <dgm:style>
+      <a:lnRef idx="2">
+        <a:scrgbClr r="0" g="0" b="0"/>
+      </a:lnRef>
+      <a:fillRef idx="1">
+        <a:scrgbClr r="0" g="0" b="0"/>
+      </a:fillRef>
+      <a:effectRef idx="0">
+        <a:scrgbClr r="0" g="0" b="0"/>
+      </a:effectRef>
+      <a:fontRef idx="minor">
+        <a:schemeClr val="lt1"/>
+      </a:fontRef>
+    </dgm:style>
+  </dgm:styleLbl>
+  <dgm:styleLbl name="asst2">
+    <dgm:scene3d>
+      <a:camera prst="orthographicFront"/>
+      <a:lightRig rig="threePt" dir="t"/>
+    </dgm:scene3d>
+    <dgm:sp3d/>
+    <dgm:txPr/>
+    <dgm:style>
+      <a:lnRef idx="2">
+        <a:scrgbClr r="0" g="0" b="0"/>
+      </a:lnRef>
+      <a:fillRef idx="1">
+        <a:scrgbClr r="0" g="0" b="0"/>
+      </a:fillRef>
+      <a:effectRef idx="0">
+        <a:scrgbClr r="0" g="0" b="0"/>
+      </a:effectRef>
+      <a:fontRef idx="minor">
+        <a:schemeClr val="lt1"/>
+      </a:fontRef>
+    </dgm:style>
+  </dgm:styleLbl>
+  <dgm:styleLbl name="asst3">
+    <dgm:scene3d>
+      <a:camera prst="orthographicFront"/>
+      <a:lightRig rig="threePt" dir="t"/>
+    </dgm:scene3d>
+    <dgm:sp3d/>
+    <dgm:txPr/>
+    <dgm:style>
+      <a:lnRef idx="2">
+        <a:scrgbClr r="0" g="0" b="0"/>
+      </a:lnRef>
+      <a:fillRef idx="1">
+        <a:scrgbClr r="0" g="0" b="0"/>
+      </a:fillRef>
+      <a:effectRef idx="0">
+        <a:scrgbClr r="0" g="0" b="0"/>
+      </a:effectRef>
+      <a:fontRef idx="minor">
+        <a:schemeClr val="lt1"/>
+      </a:fontRef>
+    </dgm:style>
+  </dgm:styleLbl>
+  <dgm:styleLbl name="asst4">
+    <dgm:scene3d>
+      <a:camera prst="orthographicFront"/>
+      <a:lightRig rig="threePt" dir="t"/>
+    </dgm:scene3d>
+    <dgm:sp3d/>
+    <dgm:txPr/>
+    <dgm:style>
+      <a:lnRef idx="2">
+        <a:scrgbClr r="0" g="0" b="0"/>
+      </a:lnRef>
+      <a:fillRef idx="1">
+        <a:scrgbClr r="0" g="0" b="0"/>
+      </a:fillRef>
+      <a:effectRef idx="0">
+        <a:scrgbClr r="0" g="0" b="0"/>
+      </a:effectRef>
+      <a:fontRef idx="minor">
+        <a:schemeClr val="lt1"/>
+      </a:fontRef>
+    </dgm:style>
+  </dgm:styleLbl>
+  <dgm:styleLbl name="parChTrans2D1">
+    <dgm:scene3d>
+      <a:camera prst="orthographicFront"/>
+      <a:lightRig rig="threePt" dir="t"/>
+    </dgm:scene3d>
+    <dgm:sp3d/>
+    <dgm:txPr/>
+    <dgm:style>
+      <a:lnRef idx="2">
+        <a:scrgbClr r="0" g="0" b="0"/>
+      </a:lnRef>
+      <a:fillRef idx="1">
+        <a:scrgbClr r="0" g="0" b="0"/>
+      </a:fillRef>
+      <a:effectRef idx="0">
+        <a:scrgbClr r="0" g="0" b="0"/>
+      </a:effectRef>
+      <a:fontRef idx="minor">
+        <a:schemeClr val="lt1"/>
+      </a:fontRef>
+    </dgm:style>
+  </dgm:styleLbl>
+  <dgm:styleLbl name="parChTrans2D2">
+    <dgm:scene3d>
+      <a:camera prst="orthographicFront"/>
+      <a:lightRig rig="threePt" dir="t"/>
+    </dgm:scene3d>
+    <dgm:sp3d/>
+    <dgm:txPr/>
+    <dgm:style>
+      <a:lnRef idx="2">
+        <a:scrgbClr r="0" g="0" b="0"/>
+      </a:lnRef>
+      <a:fillRef idx="1">
+        <a:scrgbClr r="0" g="0" b="0"/>
+      </a:fillRef>
+      <a:effectRef idx="0">
+        <a:scrgbClr r="0" g="0" b="0"/>
+      </a:effectRef>
+      <a:fontRef idx="minor">
+        <a:schemeClr val="lt1"/>
+      </a:fontRef>
+    </dgm:style>
+  </dgm:styleLbl>
+  <dgm:styleLbl name="parChTrans2D3">
+    <dgm:scene3d>
+      <a:camera prst="orthographicFront"/>
+      <a:lightRig rig="threePt" dir="t"/>
+    </dgm:scene3d>
+    <dgm:sp3d/>
+    <dgm:txPr/>
+    <dgm:style>
+      <a:lnRef idx="2">
+        <a:scrgbClr r="0" g="0" b="0"/>
+      </a:lnRef>
+      <a:fillRef idx="1">
+        <a:scrgbClr r="0" g="0" b="0"/>
+      </a:fillRef>
+      <a:effectRef idx="0">
+        <a:scrgbClr r="0" g="0" b="0"/>
+      </a:effectRef>
+      <a:fontRef idx="minor">
+        <a:schemeClr val="lt1"/>
+      </a:fontRef>
+    </dgm:style>
+  </dgm:styleLbl>
+  <dgm:styleLbl name="parChTrans2D4">
+    <dgm:scene3d>
+      <a:camera prst="orthographicFront"/>
+      <a:lightRig rig="threePt" dir="t"/>
+    </dgm:scene3d>
+    <dgm:sp3d/>
+    <dgm:txPr/>
+    <dgm:style>
+      <a:lnRef idx="2">
+        <a:scrgbClr r="0" g="0" b="0"/>
+      </a:lnRef>
+      <a:fillRef idx="1">
+        <a:scrgbClr r="0" g="0" b="0"/>
+      </a:fillRef>
+      <a:effectRef idx="0">
+        <a:scrgbClr r="0" g="0" b="0"/>
+      </a:effectRef>
+      <a:fontRef idx="minor">
+        <a:schemeClr val="lt1"/>
+      </a:fontRef>
+    </dgm:style>
+  </dgm:styleLbl>
+  <dgm:styleLbl name="parChTrans1D1">
+    <dgm:scene3d>
+      <a:camera prst="orthographicFront"/>
+      <a:lightRig rig="threePt" dir="t"/>
+    </dgm:scene3d>
+    <dgm:sp3d/>
+    <dgm:txPr/>
+    <dgm:style>
+      <a:lnRef idx="2">
+        <a:scrgbClr r="0" g="0" b="0"/>
+      </a:lnRef>
+      <a:fillRef idx="0">
+        <a:scrgbClr r="0" g="0" b="0"/>
+      </a:fillRef>
+      <a:effectRef idx="0">
+        <a:scrgbClr r="0" g="0" b="0"/>
+      </a:effectRef>
+      <a:fontRef idx="minor"/>
+    </dgm:style>
+  </dgm:styleLbl>
+  <dgm:styleLbl name="parChTrans1D2">
+    <dgm:scene3d>
+      <a:camera prst="orthographicFront"/>
+      <a:lightRig rig="threePt" dir="t"/>
+    </dgm:scene3d>
+    <dgm:sp3d/>
+    <dgm:txPr/>
+    <dgm:style>
+      <a:lnRef idx="2">
+        <a:scrgbClr r="0" g="0" b="0"/>
+      </a:lnRef>
+      <a:fillRef idx="0">
+        <a:scrgbClr r="0" g="0" b="0"/>
+      </a:fillRef>
+      <a:effectRef idx="0">
+        <a:scrgbClr r="0" g="0" b="0"/>
+      </a:effectRef>
+      <a:fontRef idx="minor"/>
+    </dgm:style>
+  </dgm:styleLbl>
+  <dgm:styleLbl name="parChTrans1D3">
+    <dgm:scene3d>
+      <a:camera prst="orthographicFront"/>
+      <a:lightRig rig="threePt" dir="t"/>
+    </dgm:scene3d>
+    <dgm:sp3d/>
+    <dgm:txPr/>
+    <dgm:style>
+      <a:lnRef idx="2">
+        <a:scrgbClr r="0" g="0" b="0"/>
+      </a:lnRef>
+      <a:fillRef idx="0">
+        <a:scrgbClr r="0" g="0" b="0"/>
+      </a:fillRef>
+      <a:effectRef idx="0">
+        <a:scrgbClr r="0" g="0" b="0"/>
+      </a:effectRef>
+      <a:fontRef idx="minor"/>
+    </dgm:style>
+  </dgm:styleLbl>
+  <dgm:styleLbl name="parChTrans1D4">
+    <dgm:scene3d>
+      <a:camera prst="orthographicFront"/>
+      <a:lightRig rig="threePt" dir="t"/>
+    </dgm:scene3d>
+    <dgm:sp3d/>
+    <dgm:txPr/>
+    <dgm:style>
+      <a:lnRef idx="2">
+        <a:scrgbClr r="0" g="0" b="0"/>
+      </a:lnRef>
+      <a:fillRef idx="0">
+        <a:scrgbClr r="0" g="0" b="0"/>
+      </a:fillRef>
+      <a:effectRef idx="0">
+        <a:scrgbClr r="0" g="0" b="0"/>
+      </a:effectRef>
+      <a:fontRef idx="minor"/>
+    </dgm:style>
+  </dgm:styleLbl>
+  <dgm:styleLbl name="fgAcc1">
+    <dgm:scene3d>
+      <a:camera prst="orthographicFront"/>
+      <a:lightRig rig="threePt" dir="t"/>
+    </dgm:scene3d>
+    <dgm:sp3d/>
+    <dgm:txPr/>
+    <dgm:style>
+      <a:lnRef idx="2">
+        <a:scrgbClr r="0" g="0" b="0"/>
+      </a:lnRef>
+      <a:fillRef idx="1">
+        <a:scrgbClr r="0" g="0" b="0"/>
+      </a:fillRef>
+      <a:effectRef idx="0">
+        <a:scrgbClr r="0" g="0" b="0"/>
+      </a:effectRef>
+      <a:fontRef idx="minor"/>
+    </dgm:style>
+  </dgm:styleLbl>
+  <dgm:styleLbl name="conFgAcc1">
+    <dgm:scene3d>
+      <a:camera prst="orthographicFront"/>
+      <a:lightRig rig="threePt" dir="t"/>
+    </dgm:scene3d>
+    <dgm:sp3d/>
+    <dgm:txPr/>
+    <dgm:style>
+      <a:lnRef idx="2">
+        <a:scrgbClr r="0" g="0" b="0"/>
+      </a:lnRef>
+      <a:fillRef idx="1">
+        <a:scrgbClr r="0" g="0" b="0"/>
+      </a:fillRef>
+      <a:effectRef idx="0">
+        <a:scrgbClr r="0" g="0" b="0"/>
+      </a:effectRef>
+      <a:fontRef idx="minor"/>
+    </dgm:style>
+  </dgm:styleLbl>
+  <dgm:styleLbl name="alignAcc1">
+    <dgm:scene3d>
+      <a:camera prst="orthographicFront"/>
+      <a:lightRig rig="threePt" dir="t"/>
+    </dgm:scene3d>
+    <dgm:sp3d/>
+    <dgm:txPr/>
+    <dgm:style>
+      <a:lnRef idx="2">
+        <a:scrgbClr r="0" g="0" b="0"/>
+      </a:lnRef>
+      <a:fillRef idx="1">
+        <a:scrgbClr r="0" g="0" b="0"/>
+      </a:fillRef>
+      <a:effectRef idx="0">
+        <a:scrgbClr r="0" g="0" b="0"/>
+      </a:effectRef>
+      <a:fontRef idx="minor"/>
+    </dgm:style>
+  </dgm:styleLbl>
+  <dgm:styleLbl name="trAlignAcc1">
+    <dgm:scene3d>
+      <a:camera prst="orthographicFront"/>
+      <a:lightRig rig="threePt" dir="t"/>
+    </dgm:scene3d>
+    <dgm:sp3d/>
+    <dgm:txPr/>
+    <dgm:style>
+      <a:lnRef idx="1">
+        <a:scrgbClr r="0" g="0" b="0"/>
+      </a:lnRef>
+      <a:fillRef idx="1">
+        <a:scrgbClr r="0" g="0" b="0"/>
+      </a:fillRef>
+      <a:effectRef idx="0">
+        <a:scrgbClr r="0" g="0" b="0"/>
+      </a:effectRef>
+      <a:fontRef idx="minor"/>
+    </dgm:style>
+  </dgm:styleLbl>
+  <dgm:styleLbl name="bgAcc1">
+    <dgm:scene3d>
+      <a:camera prst="orthographicFront"/>
+      <a:lightRig rig="threePt" dir="t"/>
+    </dgm:scene3d>
+    <dgm:sp3d/>
+    <dgm:txPr/>
+    <dgm:style>
+      <a:lnRef idx="2">
+        <a:scrgbClr r="0" g="0" b="0"/>
+      </a:lnRef>
+      <a:fillRef idx="1">
+        <a:scrgbClr r="0" g="0" b="0"/>
+      </a:fillRef>
+      <a:effectRef idx="0">
+        <a:scrgbClr r="0" g="0" b="0"/>
+      </a:effectRef>
+      <a:fontRef idx="minor"/>
+    </dgm:style>
+  </dgm:styleLbl>
+  <dgm:styleLbl name="solidFgAcc1">
+    <dgm:scene3d>
+      <a:camera prst="orthographicFront"/>
+      <a:lightRig rig="threePt" dir="t"/>
+    </dgm:scene3d>
+    <dgm:sp3d/>
+    <dgm:txPr/>
+    <dgm:style>
+      <a:lnRef idx="2">
+        <a:scrgbClr r="0" g="0" b="0"/>
+      </a:lnRef>
+      <a:fillRef idx="1">
+        <a:scrgbClr r="0" g="0" b="0"/>
+      </a:fillRef>
+      <a:effectRef idx="0">
+        <a:scrgbClr r="0" g="0" b="0"/>
+      </a:effectRef>
+      <a:fontRef idx="minor"/>
+    </dgm:style>
+  </dgm:styleLbl>
+  <dgm:styleLbl name="solidAlignAcc1">
+    <dgm:scene3d>
+      <a:camera prst="orthographicFront"/>
+      <a:lightRig rig="threePt" dir="t"/>
+    </dgm:scene3d>
+    <dgm:sp3d/>
+    <dgm:txPr/>
+    <dgm:style>
+      <a:lnRef idx="2">
+        <a:scrgbClr r="0" g="0" b="0"/>
+      </a:lnRef>
+      <a:fillRef idx="1">
+        <a:scrgbClr r="0" g="0" b="0"/>
+      </a:fillRef>
+      <a:effectRef idx="0">
+        <a:scrgbClr r="0" g="0" b="0"/>
+      </a:effectRef>
+      <a:fontRef idx="minor"/>
+    </dgm:style>
+  </dgm:styleLbl>
+  <dgm:styleLbl name="solidBgAcc1">
+    <dgm:scene3d>
+      <a:camera prst="orthographicFront"/>
+      <a:lightRig rig="threePt" dir="t"/>
+    </dgm:scene3d>
+    <dgm:sp3d/>
+    <dgm:txPr/>
+    <dgm:style>
+      <a:lnRef idx="2">
+        <a:scrgbClr r="0" g="0" b="0"/>
+      </a:lnRef>
+      <a:fillRef idx="1">
+        <a:scrgbClr r="0" g="0" b="0"/>
+      </a:fillRef>
+      <a:effectRef idx="0">
+        <a:scrgbClr r="0" g="0" b="0"/>
+      </a:effectRef>
+      <a:fontRef idx="minor"/>
+    </dgm:style>
+  </dgm:styleLbl>
+  <dgm:styleLbl name="fgAccFollowNode1">
+    <dgm:scene3d>
+      <a:camera prst="orthographicFront"/>
+      <a:lightRig rig="threePt" dir="t"/>
+    </dgm:scene3d>
+    <dgm:sp3d/>
+    <dgm:txPr/>
+    <dgm:style>
+      <a:lnRef idx="2">
+        <a:scrgbClr r="0" g="0" b="0"/>
+      </a:lnRef>
+      <a:fillRef idx="1">
+        <a:scrgbClr r="0" g="0" b="0"/>
+      </a:fillRef>
+      <a:effectRef idx="0">
+        <a:scrgbClr r="0" g="0" b="0"/>
+      </a:effectRef>
+      <a:fontRef idx="minor"/>
+    </dgm:style>
+  </dgm:styleLbl>
+  <dgm:styleLbl name="alignAccFollowNode1">
+    <dgm:scene3d>
+      <a:camera prst="orthographicFront"/>
+      <a:lightRig rig="threePt" dir="t"/>
+    </dgm:scene3d>
+    <dgm:sp3d/>
+    <dgm:txPr/>
+    <dgm:style>
+      <a:lnRef idx="2">
+        <a:scrgbClr r="0" g="0" b="0"/>
+      </a:lnRef>
+      <a:fillRef idx="1">
+        <a:scrgbClr r="0" g="0" b="0"/>
+      </a:fillRef>
+      <a:effectRef idx="0">
+        <a:scrgbClr r="0" g="0" b="0"/>
+      </a:effectRef>
+      <a:fontRef idx="minor"/>
+    </dgm:style>
+  </dgm:styleLbl>
+  <dgm:styleLbl name="bgAccFollowNode1">
+    <dgm:scene3d>
+      <a:camera prst="orthographicFront"/>
+      <a:lightRig rig="threePt" dir="t"/>
+    </dgm:scene3d>
+    <dgm:sp3d/>
+    <dgm:txPr/>
+    <dgm:style>
+      <a:lnRef idx="2">
+        <a:scrgbClr r="0" g="0" b="0"/>
+      </a:lnRef>
+      <a:fillRef idx="1">
+        <a:scrgbClr r="0" g="0" b="0"/>
+      </a:fillRef>
+      <a:effectRef idx="0">
+        <a:scrgbClr r="0" g="0" b="0"/>
+      </a:effectRef>
+      <a:fontRef idx="minor"/>
+    </dgm:style>
+  </dgm:styleLbl>
+  <dgm:styleLbl name="fgAcc0">
+    <dgm:scene3d>
+      <a:camera prst="orthographicFront"/>
+      <a:lightRig rig="threePt" dir="t"/>
+    </dgm:scene3d>
+    <dgm:sp3d/>
+    <dgm:txPr/>
+    <dgm:style>
+      <a:lnRef idx="2">
+        <a:scrgbClr r="0" g="0" b="0"/>
+      </a:lnRef>
+      <a:fillRef idx="1">
+        <a:scrgbClr r="0" g="0" b="0"/>
+      </a:fillRef>
+      <a:effectRef idx="0">
+        <a:scrgbClr r="0" g="0" b="0"/>
+      </a:effectRef>
+      <a:fontRef idx="minor"/>
+    </dgm:style>
+  </dgm:styleLbl>
+  <dgm:styleLbl name="fgAcc2">
+    <dgm:scene3d>
+      <a:camera prst="orthographicFront"/>
+      <a:lightRig rig="threePt" dir="t"/>
+    </dgm:scene3d>
+    <dgm:sp3d/>
+    <dgm:txPr/>
+    <dgm:style>
+      <a:lnRef idx="2">
+        <a:scrgbClr r="0" g="0" b="0"/>
+      </a:lnRef>
+      <a:fillRef idx="1">
+        <a:scrgbClr r="0" g="0" b="0"/>
+      </a:fillRef>
+      <a:effectRef idx="0">
+        <a:scrgbClr r="0" g="0" b="0"/>
+      </a:effectRef>
+      <a:fontRef idx="minor"/>
+    </dgm:style>
+  </dgm:styleLbl>
+  <dgm:styleLbl name="fgAcc3">
+    <dgm:scene3d>
+      <a:camera prst="orthographicFront"/>
+      <a:lightRig rig="threePt" dir="t"/>
+    </dgm:scene3d>
+    <dgm:sp3d/>
+    <dgm:txPr/>
+    <dgm:style>
+      <a:lnRef idx="2">
+        <a:scrgbClr r="0" g="0" b="0"/>
+      </a:lnRef>
+      <a:fillRef idx="1">
+        <a:scrgbClr r="0" g="0" b="0"/>
+      </a:fillRef>
+      <a:effectRef idx="0">
+        <a:scrgbClr r="0" g="0" b="0"/>
+      </a:effectRef>
+      <a:fontRef idx="minor"/>
+    </dgm:style>
+  </dgm:styleLbl>
+  <dgm:styleLbl name="fgAcc4">
+    <dgm:scene3d>
+      <a:camera prst="orthographicFront"/>
+      <a:lightRig rig="threePt" dir="t"/>
+    </dgm:scene3d>
+    <dgm:sp3d/>
+    <dgm:txPr/>
+    <dgm:style>
+      <a:lnRef idx="2">
+        <a:scrgbClr r="0" g="0" b="0"/>
+      </a:lnRef>
+      <a:fillRef idx="1">
+        <a:scrgbClr r="0" g="0" b="0"/>
+      </a:fillRef>
+      <a:effectRef idx="0">
+        <a:scrgbClr r="0" g="0" b="0"/>
+      </a:effectRef>
+      <a:fontRef idx="minor"/>
+    </dgm:style>
+  </dgm:styleLbl>
+  <dgm:styleLbl name="bgShp">
+    <dgm:scene3d>
+      <a:camera prst="orthographicFront"/>
+      <a:lightRig rig="threePt" dir="t"/>
+    </dgm:scene3d>
+    <dgm:sp3d/>
+    <dgm:txPr/>
+    <dgm:style>
+      <a:lnRef idx="0">
+        <a:scrgbClr r="0" g="0" b="0"/>
+      </a:lnRef>
+      <a:fillRef idx="1">
+        <a:scrgbClr r="0" g="0" b="0"/>
+      </a:fillRef>
+      <a:effectRef idx="0">
+        <a:scrgbClr r="0" g="0" b="0"/>
+      </a:effectRef>
+      <a:fontRef idx="minor"/>
+    </dgm:style>
+  </dgm:styleLbl>
+  <dgm:styleLbl name="dkBgShp">
+    <dgm:scene3d>
+      <a:camera prst="orthographicFront"/>
+      <a:lightRig rig="threePt" dir="t"/>
+    </dgm:scene3d>
+    <dgm:sp3d/>
+    <dgm:txPr/>
+    <dgm:style>
+      <a:lnRef idx="0">
+        <a:scrgbClr r="0" g="0" b="0"/>
+      </a:lnRef>
+      <a:fillRef idx="1">
+        <a:scrgbClr r="0" g="0" b="0"/>
+      </a:fillRef>
+      <a:effectRef idx="0">
+        <a:scrgbClr r="0" g="0" b="0"/>
+      </a:effectRef>
+      <a:fontRef idx="minor"/>
+    </dgm:style>
+  </dgm:styleLbl>
+  <dgm:styleLbl name="trBgShp">
+    <dgm:scene3d>
+      <a:camera prst="orthographicFront"/>
+      <a:lightRig rig="threePt" dir="t"/>
+    </dgm:scene3d>
+    <dgm:sp3d/>
+    <dgm:txPr/>
+    <dgm:style>
+      <a:lnRef idx="0">
+        <a:scrgbClr r="0" g="0" b="0"/>
+      </a:lnRef>
+      <a:fillRef idx="1">
+        <a:scrgbClr r="0" g="0" b="0"/>
+      </a:fillRef>
+      <a:effectRef idx="0">
+        <a:scrgbClr r="0" g="0" b="0"/>
+      </a:effectRef>
+      <a:fontRef idx="minor"/>
+    </dgm:style>
+  </dgm:styleLbl>
+  <dgm:styleLbl name="fgShp">
+    <dgm:scene3d>
+      <a:camera prst="orthographicFront"/>
+      <a:lightRig rig="threePt" dir="t"/>
+    </dgm:scene3d>
+    <dgm:sp3d/>
+    <dgm:txPr/>
+    <dgm:style>
+      <a:lnRef idx="2">
+        <a:scrgbClr r="0" g="0" b="0"/>
+      </a:lnRef>
+      <a:fillRef idx="1">
+        <a:scrgbClr r="0" g="0" b="0"/>
+      </a:fillRef>
+      <a:effectRef idx="0">
+        <a:scrgbClr r="0" g="0" b="0"/>
+      </a:effectRef>
+      <a:fontRef idx="minor"/>
+    </dgm:style>
+  </dgm:styleLbl>
+  <dgm:styleLbl name="revTx">
+    <dgm:scene3d>
+      <a:camera prst="orthographicFront"/>
+      <a:lightRig rig="threePt" dir="t"/>
+    </dgm:scene3d>
+    <dgm:sp3d/>
+    <dgm:txPr/>
+    <dgm:style>
+      <a:lnRef idx="0">
+        <a:scrgbClr r="0" g="0" b="0"/>
+      </a:lnRef>
+      <a:fillRef idx="0">
+        <a:scrgbClr r="0" g="0" b="0"/>
+      </a:fillRef>
+      <a:effectRef idx="0">
+        <a:scrgbClr r="0" g="0" b="0"/>
+      </a:effectRef>
+      <a:fontRef idx="minor"/>
+    </dgm:style>
+  </dgm:styleLbl>
+</dgm:styleDef>
+</file>
+
+<file path=ppt/diagrams/quickStyle3.xml><?xml version="1.0" encoding="utf-8"?>
 <dgm:styleDef xmlns:dgm="http://schemas.openxmlformats.org/drawingml/2006/diagram" xmlns:a="http://schemas.openxmlformats.org/drawingml/2006/main" uniqueId="urn:microsoft.com/office/officeart/2005/8/quickstyle/simple1">
   <dgm:title val=""/>
   <dgm:desc val=""/>
@@ -6589,7 +9214,7 @@
           <a:p>
             <a:fld id="{DC42B9C4-3265-4C64-80EB-D0107FD08979}" type="slidenum">
               <a:rPr lang="en-US" smtClean="0"/>
-              <a:t>11</a:t>
+              <a:t>12</a:t>
             </a:fld>
             <a:endParaRPr lang="en-US"/>
           </a:p>
@@ -11078,6 +13703,360 @@
   <p:cSld>
     <p:spTree>
       <p:nvGrpSpPr>
+        <p:cNvPr id="1" name=""/>
+        <p:cNvGrpSpPr/>
+        <p:nvPr/>
+      </p:nvGrpSpPr>
+      <p:grpSpPr>
+        <a:xfrm>
+          <a:off x="0" y="0"/>
+          <a:ext cx="0" cy="0"/>
+          <a:chOff x="0" y="0"/>
+          <a:chExt cx="0" cy="0"/>
+        </a:xfrm>
+      </p:grpSpPr>
+      <p:sp>
+        <p:nvSpPr>
+          <p:cNvPr id="6" name="Title 5">
+            <a:extLst>
+              <a:ext uri="{FF2B5EF4-FFF2-40B4-BE49-F238E27FC236}">
+                <a16:creationId xmlns:a16="http://schemas.microsoft.com/office/drawing/2014/main" id="{702CAAC8-D370-0456-8298-DF7997907ED4}"/>
+              </a:ext>
+            </a:extLst>
+          </p:cNvPr>
+          <p:cNvSpPr>
+            <a:spLocks noGrp="1"/>
+          </p:cNvSpPr>
+          <p:nvPr>
+            <p:ph type="title"/>
+          </p:nvPr>
+        </p:nvSpPr>
+        <p:spPr/>
+        <p:txBody>
+          <a:bodyPr/>
+          <a:lstStyle/>
+          <a:p>
+            <a:r>
+              <a:rPr lang="en-US"/>
+              <a:t>Move to Testing </a:t>
+            </a:r>
+            <a:r>
+              <a:rPr lang="en-US" dirty="0"/>
+              <a:t>Diamond</a:t>
+            </a:r>
+          </a:p>
+        </p:txBody>
+      </p:sp>
+      <p:sp>
+        <p:nvSpPr>
+          <p:cNvPr id="4" name="Date Placeholder 3">
+            <a:extLst>
+              <a:ext uri="{FF2B5EF4-FFF2-40B4-BE49-F238E27FC236}">
+                <a16:creationId xmlns:a16="http://schemas.microsoft.com/office/drawing/2014/main" id="{47228943-4E38-5E1E-71A5-26B910559AED}"/>
+              </a:ext>
+            </a:extLst>
+          </p:cNvPr>
+          <p:cNvSpPr>
+            <a:spLocks noGrp="1"/>
+          </p:cNvSpPr>
+          <p:nvPr>
+            <p:ph type="dt" sz="half" idx="10"/>
+          </p:nvPr>
+        </p:nvSpPr>
+        <p:spPr/>
+        <p:txBody>
+          <a:bodyPr/>
+          <a:lstStyle/>
+          <a:p>
+            <a:r>
+              <a:rPr lang="en-US"/>
+              <a:t>@jimmybogard.com</a:t>
+            </a:r>
+            <a:endParaRPr lang="en-US" dirty="0"/>
+          </a:p>
+        </p:txBody>
+      </p:sp>
+      <p:sp>
+        <p:nvSpPr>
+          <p:cNvPr id="5" name="Hexagon 4">
+            <a:extLst>
+              <a:ext uri="{FF2B5EF4-FFF2-40B4-BE49-F238E27FC236}">
+                <a16:creationId xmlns:a16="http://schemas.microsoft.com/office/drawing/2014/main" id="{09FBC270-4CB9-5A7F-087A-86DD72329DEA}"/>
+              </a:ext>
+            </a:extLst>
+          </p:cNvPr>
+          <p:cNvSpPr/>
+          <p:nvPr/>
+        </p:nvSpPr>
+        <p:spPr>
+          <a:xfrm>
+            <a:off x="7498493" y="2948481"/>
+            <a:ext cx="3855307" cy="2150076"/>
+          </a:xfrm>
+          <a:prstGeom prst="hexagon">
+            <a:avLst>
+              <a:gd name="adj" fmla="val 50581"/>
+              <a:gd name="vf" fmla="val 115470"/>
+            </a:avLst>
+          </a:prstGeom>
+        </p:spPr>
+        <p:style>
+          <a:lnRef idx="2">
+            <a:schemeClr val="accent1">
+              <a:shade val="15000"/>
+            </a:schemeClr>
+          </a:lnRef>
+          <a:fillRef idx="1">
+            <a:schemeClr val="accent1"/>
+          </a:fillRef>
+          <a:effectRef idx="0">
+            <a:schemeClr val="accent1"/>
+          </a:effectRef>
+          <a:fontRef idx="minor">
+            <a:schemeClr val="lt1"/>
+          </a:fontRef>
+        </p:style>
+        <p:txBody>
+          <a:bodyPr rtlCol="0" anchor="ctr"/>
+          <a:lstStyle/>
+          <a:p>
+            <a:pPr algn="ctr"/>
+            <a:r>
+              <a:rPr lang="en-US" dirty="0"/>
+              <a:t>Integration</a:t>
+            </a:r>
+          </a:p>
+        </p:txBody>
+      </p:sp>
+      <p:sp>
+        <p:nvSpPr>
+          <p:cNvPr id="7" name="Triangle 6">
+            <a:extLst>
+              <a:ext uri="{FF2B5EF4-FFF2-40B4-BE49-F238E27FC236}">
+                <a16:creationId xmlns:a16="http://schemas.microsoft.com/office/drawing/2014/main" id="{C9D9D836-A895-6A28-A301-0CC1546E4504}"/>
+              </a:ext>
+            </a:extLst>
+          </p:cNvPr>
+          <p:cNvSpPr/>
+          <p:nvPr/>
+        </p:nvSpPr>
+        <p:spPr>
+          <a:xfrm>
+            <a:off x="8585887" y="2071150"/>
+            <a:ext cx="1692876" cy="877331"/>
+          </a:xfrm>
+          <a:prstGeom prst="triangle">
+            <a:avLst/>
+          </a:prstGeom>
+        </p:spPr>
+        <p:style>
+          <a:lnRef idx="2">
+            <a:schemeClr val="accent5">
+              <a:shade val="15000"/>
+            </a:schemeClr>
+          </a:lnRef>
+          <a:fillRef idx="1">
+            <a:schemeClr val="accent5"/>
+          </a:fillRef>
+          <a:effectRef idx="0">
+            <a:schemeClr val="accent5"/>
+          </a:effectRef>
+          <a:fontRef idx="minor">
+            <a:schemeClr val="lt1"/>
+          </a:fontRef>
+        </p:style>
+        <p:txBody>
+          <a:bodyPr rtlCol="0" anchor="ctr"/>
+          <a:lstStyle/>
+          <a:p>
+            <a:pPr algn="ctr"/>
+            <a:r>
+              <a:rPr lang="en-US" dirty="0"/>
+              <a:t>UI</a:t>
+            </a:r>
+          </a:p>
+        </p:txBody>
+      </p:sp>
+      <p:sp>
+        <p:nvSpPr>
+          <p:cNvPr id="8" name="Triangle 7">
+            <a:extLst>
+              <a:ext uri="{FF2B5EF4-FFF2-40B4-BE49-F238E27FC236}">
+                <a16:creationId xmlns:a16="http://schemas.microsoft.com/office/drawing/2014/main" id="{36D477BE-9AF1-5AF4-F2A7-7517CEBF51AC}"/>
+              </a:ext>
+            </a:extLst>
+          </p:cNvPr>
+          <p:cNvSpPr/>
+          <p:nvPr/>
+        </p:nvSpPr>
+        <p:spPr>
+          <a:xfrm rot="10800000">
+            <a:off x="8579708" y="5098557"/>
+            <a:ext cx="1692876" cy="877331"/>
+          </a:xfrm>
+          <a:prstGeom prst="triangle">
+            <a:avLst/>
+          </a:prstGeom>
+        </p:spPr>
+        <p:style>
+          <a:lnRef idx="2">
+            <a:schemeClr val="accent5">
+              <a:shade val="15000"/>
+            </a:schemeClr>
+          </a:lnRef>
+          <a:fillRef idx="1">
+            <a:schemeClr val="accent5"/>
+          </a:fillRef>
+          <a:effectRef idx="0">
+            <a:schemeClr val="accent5"/>
+          </a:effectRef>
+          <a:fontRef idx="minor">
+            <a:schemeClr val="lt1"/>
+          </a:fontRef>
+        </p:style>
+        <p:txBody>
+          <a:bodyPr vert="horz" rtlCol="0" anchor="ctr"/>
+          <a:lstStyle/>
+          <a:p>
+            <a:pPr algn="ctr"/>
+            <a:endParaRPr lang="en-US" dirty="0"/>
+          </a:p>
+        </p:txBody>
+      </p:sp>
+      <p:sp>
+        <p:nvSpPr>
+          <p:cNvPr id="9" name="TextBox 8">
+            <a:extLst>
+              <a:ext uri="{FF2B5EF4-FFF2-40B4-BE49-F238E27FC236}">
+                <a16:creationId xmlns:a16="http://schemas.microsoft.com/office/drawing/2014/main" id="{0A9A7DEA-EF39-7A03-E8F5-3E22617D7AD4}"/>
+              </a:ext>
+            </a:extLst>
+          </p:cNvPr>
+          <p:cNvSpPr txBox="1"/>
+          <p:nvPr/>
+        </p:nvSpPr>
+        <p:spPr>
+          <a:xfrm>
+            <a:off x="8991599" y="5167891"/>
+            <a:ext cx="869092" cy="369332"/>
+          </a:xfrm>
+          <a:prstGeom prst="rect">
+            <a:avLst/>
+          </a:prstGeom>
+          <a:noFill/>
+        </p:spPr>
+        <p:txBody>
+          <a:bodyPr wrap="square" rtlCol="0">
+            <a:spAutoFit/>
+          </a:bodyPr>
+          <a:lstStyle/>
+          <a:p>
+            <a:pPr algn="ctr"/>
+            <a:r>
+              <a:rPr lang="en-US" dirty="0">
+                <a:solidFill>
+                  <a:schemeClr val="bg1"/>
+                </a:solidFill>
+              </a:rPr>
+              <a:t>Unit</a:t>
+            </a:r>
+          </a:p>
+        </p:txBody>
+      </p:sp>
+      <p:graphicFrame>
+        <p:nvGraphicFramePr>
+          <p:cNvPr id="10" name="Content Placeholder 4">
+            <a:extLst>
+              <a:ext uri="{FF2B5EF4-FFF2-40B4-BE49-F238E27FC236}">
+                <a16:creationId xmlns:a16="http://schemas.microsoft.com/office/drawing/2014/main" id="{800228F5-6C71-4C19-33EF-0DF9C7F3CFCF}"/>
+              </a:ext>
+            </a:extLst>
+          </p:cNvPr>
+          <p:cNvGraphicFramePr>
+            <a:graphicFrameLocks/>
+          </p:cNvGraphicFramePr>
+          <p:nvPr>
+            <p:extLst>
+              <p:ext uri="{D42A27DB-BD31-4B8C-83A1-F6EECF244321}">
+                <p14:modId xmlns:p14="http://schemas.microsoft.com/office/powerpoint/2010/main" val="260216323"/>
+              </p:ext>
+            </p:extLst>
+          </p:nvPr>
+        </p:nvGraphicFramePr>
+        <p:xfrm>
+          <a:off x="385121" y="2303957"/>
+          <a:ext cx="4619366" cy="3228482"/>
+        </p:xfrm>
+        <a:graphic>
+          <a:graphicData uri="http://schemas.openxmlformats.org/drawingml/2006/diagram">
+            <dgm:relIds xmlns:dgm="http://schemas.openxmlformats.org/drawingml/2006/diagram" xmlns:r="http://schemas.openxmlformats.org/officeDocument/2006/relationships" r:dm="rId2" r:lo="rId3" r:qs="rId4" r:cs="rId5"/>
+          </a:graphicData>
+        </a:graphic>
+      </p:graphicFrame>
+      <p:sp>
+        <p:nvSpPr>
+          <p:cNvPr id="11" name="Right Arrow 10">
+            <a:extLst>
+              <a:ext uri="{FF2B5EF4-FFF2-40B4-BE49-F238E27FC236}">
+                <a16:creationId xmlns:a16="http://schemas.microsoft.com/office/drawing/2014/main" id="{6513E463-902A-0E0F-E6E7-D8A4F450A690}"/>
+              </a:ext>
+            </a:extLst>
+          </p:cNvPr>
+          <p:cNvSpPr/>
+          <p:nvPr/>
+        </p:nvSpPr>
+        <p:spPr>
+          <a:xfrm>
+            <a:off x="5414319" y="3693275"/>
+            <a:ext cx="1674341" cy="660487"/>
+          </a:xfrm>
+          <a:prstGeom prst="rightArrow">
+            <a:avLst/>
+          </a:prstGeom>
+        </p:spPr>
+        <p:style>
+          <a:lnRef idx="2">
+            <a:schemeClr val="accent1">
+              <a:shade val="15000"/>
+            </a:schemeClr>
+          </a:lnRef>
+          <a:fillRef idx="1">
+            <a:schemeClr val="accent1"/>
+          </a:fillRef>
+          <a:effectRef idx="0">
+            <a:schemeClr val="accent1"/>
+          </a:effectRef>
+          <a:fontRef idx="minor">
+            <a:schemeClr val="lt1"/>
+          </a:fontRef>
+        </p:style>
+        <p:txBody>
+          <a:bodyPr rtlCol="0" anchor="ctr"/>
+          <a:lstStyle/>
+          <a:p>
+            <a:pPr algn="ctr"/>
+            <a:endParaRPr lang="en-US"/>
+          </a:p>
+        </p:txBody>
+      </p:sp>
+    </p:spTree>
+    <p:extLst>
+      <p:ext uri="{BB962C8B-B14F-4D97-AF65-F5344CB8AC3E}">
+        <p14:creationId xmlns:p14="http://schemas.microsoft.com/office/powerpoint/2010/main" val="430291657"/>
+      </p:ext>
+    </p:extLst>
+  </p:cSld>
+  <p:clrMapOvr>
+    <a:masterClrMapping/>
+  </p:clrMapOvr>
+</p:sld>
+</file>
+
+<file path=ppt/slides/slide12.xml><?xml version="1.0" encoding="utf-8"?>
+<p:sld xmlns:a="http://schemas.openxmlformats.org/drawingml/2006/main" xmlns:r="http://schemas.openxmlformats.org/officeDocument/2006/relationships" xmlns:p="http://schemas.openxmlformats.org/presentationml/2006/main">
+  <p:cSld>
+    <p:spTree>
+      <p:nvGrpSpPr>
         <p:cNvPr id="1" name="">
           <a:extLst>
             <a:ext uri="{FF2B5EF4-FFF2-40B4-BE49-F238E27FC236}">
@@ -11317,6 +14296,42 @@
           <a:xfrm>
             <a:off x="3244062" y="5090270"/>
             <a:ext cx="914400" cy="1447800"/>
+          </a:xfrm>
+          <a:prstGeom prst="rect">
+            <a:avLst/>
+          </a:prstGeom>
+        </p:spPr>
+      </p:pic>
+      <p:pic>
+        <p:nvPicPr>
+          <p:cNvPr id="7" name="Picture 6">
+            <a:extLst>
+              <a:ext uri="{FF2B5EF4-FFF2-40B4-BE49-F238E27FC236}">
+                <a16:creationId xmlns:a16="http://schemas.microsoft.com/office/drawing/2014/main" id="{E1AA091D-0662-FC19-47D6-1F7CD039C696}"/>
+              </a:ext>
+            </a:extLst>
+          </p:cNvPr>
+          <p:cNvPicPr>
+            <a:picLocks noChangeAspect="1"/>
+          </p:cNvPicPr>
+          <p:nvPr/>
+        </p:nvPicPr>
+        <p:blipFill>
+          <a:blip r:embed="rId9">
+            <a:extLst>
+              <a:ext uri="{28A0092B-C50C-407E-A947-70E740481C1C}">
+                <a14:useLocalDpi xmlns:a14="http://schemas.microsoft.com/office/drawing/2010/main" val="0"/>
+              </a:ext>
+            </a:extLst>
+          </a:blip>
+          <a:stretch>
+            <a:fillRect/>
+          </a:stretch>
+        </p:blipFill>
+        <p:spPr>
+          <a:xfrm>
+            <a:off x="9310375" y="2685300"/>
+            <a:ext cx="2304465" cy="2304465"/>
           </a:xfrm>
           <a:prstGeom prst="rect">
             <a:avLst/>

--- a/BuildingTheUltimateSafetyNetWithIntegrationTests/BuildingTheUltimateSafetyNetWithIntegrationTests.pptx
+++ b/BuildingTheUltimateSafetyNetWithIntegrationTests/BuildingTheUltimateSafetyNetWithIntegrationTests.pptx
@@ -8764,7 +8764,7 @@
           <a:p>
             <a:fld id="{BA11CBBD-FCCC-4341-9A07-9341F6C54581}" type="datetimeFigureOut">
               <a:rPr lang="en-US" smtClean="0"/>
-              <a:t>10/28/25</a:t>
+              <a:t>4/23/26</a:t>
             </a:fld>
             <a:endParaRPr lang="en-US"/>
           </a:p>
@@ -9913,10 +9913,10 @@
           <p:nvPr userDrawn="1"/>
         </p:nvPicPr>
         <p:blipFill rotWithShape="1">
-          <a:blip r:embed="rId2">
+          <a:blip>
             <a:extLst>
               <a:ext uri="{96DAC541-7B7A-43D3-8B79-37D633B846F1}">
-                <asvg:svgBlip xmlns:asvg="http://schemas.microsoft.com/office/drawing/2016/SVG/main" r:embed="rId3"/>
+                <asvg:svgBlip xmlns:asvg="http://schemas.microsoft.com/office/drawing/2016/SVG/main" r:embed="rId2"/>
               </a:ext>
             </a:extLst>
           </a:blip>
@@ -10290,10 +10290,10 @@
           <p:nvPr userDrawn="1"/>
         </p:nvPicPr>
         <p:blipFill rotWithShape="1">
-          <a:blip r:embed="rId3">
+          <a:blip>
             <a:extLst>
               <a:ext uri="{96DAC541-7B7A-43D3-8B79-37D633B846F1}">
-                <asvg:svgBlip xmlns:asvg="http://schemas.microsoft.com/office/drawing/2016/SVG/main" r:embed="rId4"/>
+                <asvg:svgBlip xmlns:asvg="http://schemas.microsoft.com/office/drawing/2016/SVG/main" r:embed="rId3"/>
               </a:ext>
             </a:extLst>
           </a:blip>
@@ -14296,42 +14296,6 @@
           <a:xfrm>
             <a:off x="3244062" y="5090270"/>
             <a:ext cx="914400" cy="1447800"/>
-          </a:xfrm>
-          <a:prstGeom prst="rect">
-            <a:avLst/>
-          </a:prstGeom>
-        </p:spPr>
-      </p:pic>
-      <p:pic>
-        <p:nvPicPr>
-          <p:cNvPr id="7" name="Picture 6">
-            <a:extLst>
-              <a:ext uri="{FF2B5EF4-FFF2-40B4-BE49-F238E27FC236}">
-                <a16:creationId xmlns:a16="http://schemas.microsoft.com/office/drawing/2014/main" id="{E1AA091D-0662-FC19-47D6-1F7CD039C696}"/>
-              </a:ext>
-            </a:extLst>
-          </p:cNvPr>
-          <p:cNvPicPr>
-            <a:picLocks noChangeAspect="1"/>
-          </p:cNvPicPr>
-          <p:nvPr/>
-        </p:nvPicPr>
-        <p:blipFill>
-          <a:blip r:embed="rId9">
-            <a:extLst>
-              <a:ext uri="{28A0092B-C50C-407E-A947-70E740481C1C}">
-                <a14:useLocalDpi xmlns:a14="http://schemas.microsoft.com/office/drawing/2010/main" val="0"/>
-              </a:ext>
-            </a:extLst>
-          </a:blip>
-          <a:stretch>
-            <a:fillRect/>
-          </a:stretch>
-        </p:blipFill>
-        <p:spPr>
-          <a:xfrm>
-            <a:off x="9310375" y="2685300"/>
-            <a:ext cx="2304465" cy="2304465"/>
           </a:xfrm>
           <a:prstGeom prst="rect">
             <a:avLst/>

--- a/BuildingTheUltimateSafetyNetWithIntegrationTests/BuildingTheUltimateSafetyNetWithIntegrationTests.pptx
+++ b/BuildingTheUltimateSafetyNetWithIntegrationTests/BuildingTheUltimateSafetyNetWithIntegrationTests.pptx
@@ -5,7 +5,7 @@
     <p:sldMasterId id="2147483648" r:id="rId1"/>
   </p:sldMasterIdLst>
   <p:notesMasterIdLst>
-    <p:notesMasterId r:id="rId14"/>
+    <p:notesMasterId r:id="rId15"/>
   </p:notesMasterIdLst>
   <p:sldIdLst>
     <p:sldId id="292" r:id="rId2"/>
@@ -20,6 +20,7 @@
     <p:sldId id="302" r:id="rId11"/>
     <p:sldId id="303" r:id="rId12"/>
     <p:sldId id="293" r:id="rId13"/>
+    <p:sldId id="304" r:id="rId14"/>
   </p:sldIdLst>
   <p:sldSz cx="12192000" cy="6858000"/>
   <p:notesSz cx="6858000" cy="9144000"/>
@@ -3639,7 +3640,7 @@
       <dsp:spPr>
         <a:xfrm>
           <a:off x="0" y="1781334"/>
-          <a:ext cx="1314449" cy="788669"/>
+          <a:ext cx="1314449" cy="788670"/>
         </a:xfrm>
         <a:prstGeom prst="roundRect">
           <a:avLst>
@@ -3708,7 +3709,7 @@
       </dsp:txBody>
       <dsp:txXfrm>
         <a:off x="23099" y="1804433"/>
-        <a:ext cx="1268251" cy="742471"/>
+        <a:ext cx="1268251" cy="742472"/>
       </dsp:txXfrm>
     </dsp:sp>
     <dsp:sp modelId="{2242D531-CCDB-1D4A-926B-944E06256EDE}">
@@ -3788,7 +3789,7 @@
       <dsp:spPr>
         <a:xfrm>
           <a:off x="1840230" y="1781334"/>
-          <a:ext cx="1314449" cy="788669"/>
+          <a:ext cx="1314449" cy="788670"/>
         </a:xfrm>
         <a:prstGeom prst="roundRect">
           <a:avLst>
@@ -3857,7 +3858,7 @@
       </dsp:txBody>
       <dsp:txXfrm>
         <a:off x="1863329" y="1804433"/>
-        <a:ext cx="1268251" cy="742471"/>
+        <a:ext cx="1268251" cy="742472"/>
       </dsp:txXfrm>
     </dsp:sp>
     <dsp:sp modelId="{FA6116E7-0059-F04A-8A34-DBF025117CE6}">
@@ -3937,7 +3938,7 @@
       <dsp:spPr>
         <a:xfrm>
           <a:off x="3680460" y="1781334"/>
-          <a:ext cx="1314449" cy="788669"/>
+          <a:ext cx="1314449" cy="788670"/>
         </a:xfrm>
         <a:prstGeom prst="roundRect">
           <a:avLst>
@@ -4006,7 +4007,7 @@
       </dsp:txBody>
       <dsp:txXfrm>
         <a:off x="3703559" y="1804433"/>
-        <a:ext cx="1268251" cy="742471"/>
+        <a:ext cx="1268251" cy="742472"/>
       </dsp:txXfrm>
     </dsp:sp>
     <dsp:sp modelId="{13868FF7-4645-B245-A77A-1955027F7ED7}">
@@ -4086,7 +4087,7 @@
       <dsp:spPr>
         <a:xfrm>
           <a:off x="5520690" y="1781334"/>
-          <a:ext cx="1314449" cy="788669"/>
+          <a:ext cx="1314449" cy="788670"/>
         </a:xfrm>
         <a:prstGeom prst="roundRect">
           <a:avLst>
@@ -4155,7 +4156,7 @@
       </dsp:txBody>
       <dsp:txXfrm>
         <a:off x="5543789" y="1804433"/>
-        <a:ext cx="1268251" cy="742471"/>
+        <a:ext cx="1268251" cy="742472"/>
       </dsp:txXfrm>
     </dsp:sp>
     <dsp:sp modelId="{4F759990-94BE-D940-A2FE-1F91BF6F1387}">
@@ -4235,7 +4236,7 @@
       <dsp:spPr>
         <a:xfrm>
           <a:off x="7360920" y="1781334"/>
-          <a:ext cx="1314449" cy="788669"/>
+          <a:ext cx="1314449" cy="788670"/>
         </a:xfrm>
         <a:prstGeom prst="roundRect">
           <a:avLst>
@@ -4304,7 +4305,7 @@
       </dsp:txBody>
       <dsp:txXfrm>
         <a:off x="7384019" y="1804433"/>
-        <a:ext cx="1268251" cy="742471"/>
+        <a:ext cx="1268251" cy="742472"/>
       </dsp:txXfrm>
     </dsp:sp>
     <dsp:sp modelId="{96A2D345-6694-DB4C-9170-94AF47152348}">
@@ -4384,7 +4385,7 @@
       <dsp:spPr>
         <a:xfrm>
           <a:off x="9201149" y="1781334"/>
-          <a:ext cx="1314449" cy="788669"/>
+          <a:ext cx="1314449" cy="788670"/>
         </a:xfrm>
         <a:prstGeom prst="roundRect">
           <a:avLst>
@@ -4453,7 +4454,7 @@
       </dsp:txBody>
       <dsp:txXfrm>
         <a:off x="9224248" y="1804433"/>
-        <a:ext cx="1268251" cy="742471"/>
+        <a:ext cx="1268251" cy="742472"/>
       </dsp:txXfrm>
     </dsp:sp>
   </dsp:spTree>
@@ -8764,7 +8765,7 @@
           <a:p>
             <a:fld id="{BA11CBBD-FCCC-4341-9A07-9341F6C54581}" type="datetimeFigureOut">
               <a:rPr lang="en-US" smtClean="0"/>
-              <a:t>4/23/26</a:t>
+              <a:t>5/12/26</a:t>
             </a:fld>
             <a:endParaRPr lang="en-US"/>
           </a:p>
@@ -9224,6 +9225,119 @@
     <p:extLst>
       <p:ext uri="{BB962C8B-B14F-4D97-AF65-F5344CB8AC3E}">
         <p14:creationId xmlns:p14="http://schemas.microsoft.com/office/powerpoint/2010/main" val="842696123"/>
+      </p:ext>
+    </p:extLst>
+  </p:cSld>
+  <p:clrMapOvr>
+    <a:masterClrMapping/>
+  </p:clrMapOvr>
+</p:notes>
+</file>
+
+<file path=ppt/notesSlides/notesSlide3.xml><?xml version="1.0" encoding="utf-8"?>
+<p:notes xmlns:a="http://schemas.openxmlformats.org/drawingml/2006/main" xmlns:r="http://schemas.openxmlformats.org/officeDocument/2006/relationships" xmlns:p="http://schemas.openxmlformats.org/presentationml/2006/main">
+  <p:cSld>
+    <p:spTree>
+      <p:nvGrpSpPr>
+        <p:cNvPr id="1" name="">
+          <a:extLst>
+            <a:ext uri="{FF2B5EF4-FFF2-40B4-BE49-F238E27FC236}">
+              <a16:creationId xmlns:a16="http://schemas.microsoft.com/office/drawing/2014/main" id="{8422B453-1087-D260-D1DB-F1D5BB595C96}"/>
+            </a:ext>
+          </a:extLst>
+        </p:cNvPr>
+        <p:cNvGrpSpPr/>
+        <p:nvPr/>
+      </p:nvGrpSpPr>
+      <p:grpSpPr>
+        <a:xfrm>
+          <a:off x="0" y="0"/>
+          <a:ext cx="0" cy="0"/>
+          <a:chOff x="0" y="0"/>
+          <a:chExt cx="0" cy="0"/>
+        </a:xfrm>
+      </p:grpSpPr>
+      <p:sp>
+        <p:nvSpPr>
+          <p:cNvPr id="2" name="Slide Image Placeholder 1">
+            <a:extLst>
+              <a:ext uri="{FF2B5EF4-FFF2-40B4-BE49-F238E27FC236}">
+                <a16:creationId xmlns:a16="http://schemas.microsoft.com/office/drawing/2014/main" id="{3CDEE869-281F-56ED-8A14-5AFCFE084E03}"/>
+              </a:ext>
+            </a:extLst>
+          </p:cNvPr>
+          <p:cNvSpPr>
+            <a:spLocks noGrp="1" noRot="1" noChangeAspect="1"/>
+          </p:cNvSpPr>
+          <p:nvPr>
+            <p:ph type="sldImg"/>
+          </p:nvPr>
+        </p:nvSpPr>
+        <p:spPr>
+          <a:xfrm>
+            <a:off x="381000" y="685800"/>
+            <a:ext cx="6096000" cy="3429000"/>
+          </a:xfrm>
+        </p:spPr>
+      </p:sp>
+      <p:sp>
+        <p:nvSpPr>
+          <p:cNvPr id="3" name="Notes Placeholder 2">
+            <a:extLst>
+              <a:ext uri="{FF2B5EF4-FFF2-40B4-BE49-F238E27FC236}">
+                <a16:creationId xmlns:a16="http://schemas.microsoft.com/office/drawing/2014/main" id="{E43AD1F3-9FA8-6372-AB9E-8B71C73E1EA4}"/>
+              </a:ext>
+            </a:extLst>
+          </p:cNvPr>
+          <p:cNvSpPr>
+            <a:spLocks noGrp="1"/>
+          </p:cNvSpPr>
+          <p:nvPr>
+            <p:ph type="body" idx="1"/>
+          </p:nvPr>
+        </p:nvSpPr>
+        <p:spPr/>
+        <p:txBody>
+          <a:bodyPr/>
+          <a:lstStyle/>
+          <a:p>
+            <a:endParaRPr lang="en-US" dirty="0"/>
+          </a:p>
+        </p:txBody>
+      </p:sp>
+      <p:sp>
+        <p:nvSpPr>
+          <p:cNvPr id="4" name="Slide Number Placeholder 3">
+            <a:extLst>
+              <a:ext uri="{FF2B5EF4-FFF2-40B4-BE49-F238E27FC236}">
+                <a16:creationId xmlns:a16="http://schemas.microsoft.com/office/drawing/2014/main" id="{9CEBF79B-34D7-A462-669C-C50F1CA30BA0}"/>
+              </a:ext>
+            </a:extLst>
+          </p:cNvPr>
+          <p:cNvSpPr>
+            <a:spLocks noGrp="1"/>
+          </p:cNvSpPr>
+          <p:nvPr>
+            <p:ph type="sldNum" sz="quarter" idx="10"/>
+          </p:nvPr>
+        </p:nvSpPr>
+        <p:spPr/>
+        <p:txBody>
+          <a:bodyPr/>
+          <a:lstStyle/>
+          <a:p>
+            <a:fld id="{DC42B9C4-3265-4C64-80EB-D0107FD08979}" type="slidenum">
+              <a:rPr lang="en-US" smtClean="0"/>
+              <a:t>13</a:t>
+            </a:fld>
+            <a:endParaRPr lang="en-US"/>
+          </a:p>
+        </p:txBody>
+      </p:sp>
+    </p:spTree>
+    <p:extLst>
+      <p:ext uri="{BB962C8B-B14F-4D97-AF65-F5344CB8AC3E}">
+        <p14:creationId xmlns:p14="http://schemas.microsoft.com/office/powerpoint/2010/main" val="2366879248"/>
       </p:ext>
     </p:extLst>
   </p:cSld>
@@ -14053,7 +14167,7 @@
 </file>
 
 <file path=ppt/slides/slide12.xml><?xml version="1.0" encoding="utf-8"?>
-<p:sld xmlns:a="http://schemas.openxmlformats.org/drawingml/2006/main" xmlns:r="http://schemas.openxmlformats.org/officeDocument/2006/relationships" xmlns:p="http://schemas.openxmlformats.org/presentationml/2006/main">
+<p:sld xmlns:a="http://schemas.openxmlformats.org/drawingml/2006/main" xmlns:r="http://schemas.openxmlformats.org/officeDocument/2006/relationships" xmlns:p="http://schemas.openxmlformats.org/presentationml/2006/main" show="0">
   <p:cSld>
     <p:spTree>
       <p:nvGrpSpPr>
@@ -14318,6 +14432,190 @@
 </p:sld>
 </file>
 
+<file path=ppt/slides/slide13.xml><?xml version="1.0" encoding="utf-8"?>
+<p:sld xmlns:a="http://schemas.openxmlformats.org/drawingml/2006/main" xmlns:r="http://schemas.openxmlformats.org/officeDocument/2006/relationships" xmlns:p="http://schemas.openxmlformats.org/presentationml/2006/main">
+  <p:cSld>
+    <p:spTree>
+      <p:nvGrpSpPr>
+        <p:cNvPr id="1" name="">
+          <a:extLst>
+            <a:ext uri="{FF2B5EF4-FFF2-40B4-BE49-F238E27FC236}">
+              <a16:creationId xmlns:a16="http://schemas.microsoft.com/office/drawing/2014/main" id="{BCB9BFED-4301-5A08-3919-48D05B2DEE76}"/>
+            </a:ext>
+          </a:extLst>
+        </p:cNvPr>
+        <p:cNvGrpSpPr/>
+        <p:nvPr/>
+      </p:nvGrpSpPr>
+      <p:grpSpPr>
+        <a:xfrm>
+          <a:off x="0" y="0"/>
+          <a:ext cx="0" cy="0"/>
+          <a:chOff x="0" y="0"/>
+          <a:chExt cx="0" cy="0"/>
+        </a:xfrm>
+      </p:grpSpPr>
+      <p:sp>
+        <p:nvSpPr>
+          <p:cNvPr id="2" name="Title 1">
+            <a:extLst>
+              <a:ext uri="{FF2B5EF4-FFF2-40B4-BE49-F238E27FC236}">
+                <a16:creationId xmlns:a16="http://schemas.microsoft.com/office/drawing/2014/main" id="{5C1B11B6-3DFE-D1DF-F2EB-BA35B415863D}"/>
+              </a:ext>
+            </a:extLst>
+          </p:cNvPr>
+          <p:cNvSpPr>
+            <a:spLocks noGrp="1"/>
+          </p:cNvSpPr>
+          <p:nvPr>
+            <p:ph type="ctrTitle"/>
+            <p:custDataLst>
+              <p:tags r:id="rId2"/>
+            </p:custDataLst>
+          </p:nvPr>
+        </p:nvSpPr>
+        <p:spPr>
+          <a:xfrm>
+            <a:off x="161980" y="297700"/>
+            <a:ext cx="11868040" cy="2387600"/>
+          </a:xfrm>
+        </p:spPr>
+        <p:txBody>
+          <a:bodyPr anchor="ctr">
+            <a:noAutofit/>
+          </a:bodyPr>
+          <a:lstStyle/>
+          <a:p>
+            <a:r>
+              <a:rPr lang="en-US" sz="6600" dirty="0">
+                <a:solidFill>
+                  <a:prstClr val="black"/>
+                </a:solidFill>
+              </a:rPr>
+              <a:t>Building the Ultimate Safety Net with Integration Tests</a:t>
+            </a:r>
+            <a:endParaRPr lang="en-US" sz="4800" dirty="0"/>
+          </a:p>
+        </p:txBody>
+      </p:sp>
+      <p:sp>
+        <p:nvSpPr>
+          <p:cNvPr id="3" name="Subtitle 2">
+            <a:extLst>
+              <a:ext uri="{FF2B5EF4-FFF2-40B4-BE49-F238E27FC236}">
+                <a16:creationId xmlns:a16="http://schemas.microsoft.com/office/drawing/2014/main" id="{9CADB7C0-AE0C-FE1B-46CF-F2F49BABD8B1}"/>
+              </a:ext>
+            </a:extLst>
+          </p:cNvPr>
+          <p:cNvSpPr>
+            <a:spLocks noGrp="1"/>
+          </p:cNvSpPr>
+          <p:nvPr>
+            <p:ph type="subTitle" idx="1"/>
+            <p:custDataLst>
+              <p:tags r:id="rId3"/>
+            </p:custDataLst>
+          </p:nvPr>
+        </p:nvSpPr>
+        <p:spPr>
+          <a:xfrm>
+            <a:off x="414144" y="3949392"/>
+            <a:ext cx="6249076" cy="1608816"/>
+          </a:xfrm>
+        </p:spPr>
+        <p:txBody>
+          <a:bodyPr>
+            <a:normAutofit fontScale="92500" lnSpcReduction="10000"/>
+          </a:bodyPr>
+          <a:lstStyle/>
+          <a:p>
+            <a:r>
+              <a:rPr lang="en-US" dirty="0" err="1"/>
+              <a:t>github.com</a:t>
+            </a:r>
+            <a:r>
+              <a:rPr lang="en-US" dirty="0"/>
+              <a:t>/jbogard/presentations</a:t>
+            </a:r>
+          </a:p>
+          <a:p>
+            <a:r>
+              <a:rPr lang="en-US" dirty="0"/>
+              <a:t>Jimmy Bogard</a:t>
+            </a:r>
+          </a:p>
+          <a:p>
+            <a:r>
+              <a:rPr lang="en-US" dirty="0"/>
+              <a:t>@</a:t>
+            </a:r>
+            <a:r>
+              <a:rPr lang="en-US" dirty="0" err="1"/>
+              <a:t>jimmybogard.com</a:t>
+            </a:r>
+            <a:endParaRPr lang="en-US" dirty="0"/>
+          </a:p>
+          <a:p>
+            <a:r>
+              <a:rPr lang="en-US" dirty="0" err="1"/>
+              <a:t>jimmybogard.com</a:t>
+            </a:r>
+            <a:endParaRPr lang="en-US" dirty="0"/>
+          </a:p>
+        </p:txBody>
+      </p:sp>
+      <p:pic>
+        <p:nvPicPr>
+          <p:cNvPr id="7" name="Picture 6">
+            <a:extLst>
+              <a:ext uri="{FF2B5EF4-FFF2-40B4-BE49-F238E27FC236}">
+                <a16:creationId xmlns:a16="http://schemas.microsoft.com/office/drawing/2014/main" id="{694E9F6F-6E43-B56A-61D5-7EC26730E8BC}"/>
+              </a:ext>
+            </a:extLst>
+          </p:cNvPr>
+          <p:cNvPicPr>
+            <a:picLocks noChangeAspect="1"/>
+          </p:cNvPicPr>
+          <p:nvPr/>
+        </p:nvPicPr>
+        <p:blipFill>
+          <a:blip r:embed="rId6">
+            <a:extLst>
+              <a:ext uri="{28A0092B-C50C-407E-A947-70E740481C1C}">
+                <a14:useLocalDpi xmlns:a14="http://schemas.microsoft.com/office/drawing/2010/main" val="0"/>
+              </a:ext>
+            </a:extLst>
+          </a:blip>
+          <a:stretch>
+            <a:fillRect/>
+          </a:stretch>
+        </p:blipFill>
+        <p:spPr>
+          <a:xfrm>
+            <a:off x="7210096" y="2843080"/>
+            <a:ext cx="3821441" cy="3821441"/>
+          </a:xfrm>
+          <a:prstGeom prst="rect">
+            <a:avLst/>
+          </a:prstGeom>
+        </p:spPr>
+      </p:pic>
+    </p:spTree>
+    <p:custDataLst>
+      <p:tags r:id="rId1"/>
+    </p:custDataLst>
+    <p:extLst>
+      <p:ext uri="{BB962C8B-B14F-4D97-AF65-F5344CB8AC3E}">
+        <p14:creationId xmlns:p14="http://schemas.microsoft.com/office/powerpoint/2010/main" val="2659608959"/>
+      </p:ext>
+    </p:extLst>
+  </p:cSld>
+  <p:clrMapOvr>
+    <a:masterClrMapping/>
+  </p:clrMapOvr>
+</p:sld>
+</file>
+
 <file path=ppt/slides/slide2.xml><?xml version="1.0" encoding="utf-8"?>
 <p:sld xmlns:a="http://schemas.openxmlformats.org/drawingml/2006/main" xmlns:r="http://schemas.openxmlformats.org/officeDocument/2006/relationships" xmlns:p="http://schemas.openxmlformats.org/presentationml/2006/main">
   <p:cSld>
@@ -14609,7 +14907,7 @@
             <p:ph idx="1"/>
             <p:extLst>
               <p:ext uri="{D42A27DB-BD31-4B8C-83A1-F6EECF244321}">
-                <p14:modId xmlns:p14="http://schemas.microsoft.com/office/powerpoint/2010/main" val="3629501999"/>
+                <p14:modId xmlns:p14="http://schemas.microsoft.com/office/powerpoint/2010/main" val="1533181668"/>
               </p:ext>
             </p:extLst>
           </p:nvPr>
@@ -16800,6 +17098,235 @@
   <p:clrMapOvr>
     <a:masterClrMapping/>
   </p:clrMapOvr>
+  <p:timing>
+    <p:tnLst>
+      <p:par>
+        <p:cTn id="1" dur="indefinite" restart="never" nodeType="tmRoot">
+          <p:childTnLst>
+            <p:seq concurrent="1" nextAc="seek">
+              <p:cTn id="2" dur="indefinite" nodeType="mainSeq">
+                <p:childTnLst>
+                  <p:par>
+                    <p:cTn id="3" fill="hold">
+                      <p:stCondLst>
+                        <p:cond delay="indefinite"/>
+                      </p:stCondLst>
+                      <p:childTnLst>
+                        <p:par>
+                          <p:cTn id="4" fill="hold">
+                            <p:stCondLst>
+                              <p:cond delay="0"/>
+                            </p:stCondLst>
+                            <p:childTnLst>
+                              <p:par>
+                                <p:cTn id="5" presetID="1" presetClass="entr" presetSubtype="0" fill="hold" grpId="0" nodeType="clickEffect">
+                                  <p:stCondLst>
+                                    <p:cond delay="0"/>
+                                  </p:stCondLst>
+                                  <p:childTnLst>
+                                    <p:set>
+                                      <p:cBhvr>
+                                        <p:cTn id="6" dur="1" fill="hold">
+                                          <p:stCondLst>
+                                            <p:cond delay="0"/>
+                                          </p:stCondLst>
+                                        </p:cTn>
+                                        <p:tgtEl>
+                                          <p:spTgt spid="3">
+                                            <p:txEl>
+                                              <p:pRg st="0" end="0"/>
+                                            </p:txEl>
+                                          </p:spTgt>
+                                        </p:tgtEl>
+                                        <p:attrNameLst>
+                                          <p:attrName>style.visibility</p:attrName>
+                                        </p:attrNameLst>
+                                      </p:cBhvr>
+                                      <p:to>
+                                        <p:strVal val="visible"/>
+                                      </p:to>
+                                    </p:set>
+                                  </p:childTnLst>
+                                </p:cTn>
+                              </p:par>
+                            </p:childTnLst>
+                          </p:cTn>
+                        </p:par>
+                      </p:childTnLst>
+                    </p:cTn>
+                  </p:par>
+                  <p:par>
+                    <p:cTn id="7" fill="hold">
+                      <p:stCondLst>
+                        <p:cond delay="indefinite"/>
+                      </p:stCondLst>
+                      <p:childTnLst>
+                        <p:par>
+                          <p:cTn id="8" fill="hold">
+                            <p:stCondLst>
+                              <p:cond delay="0"/>
+                            </p:stCondLst>
+                            <p:childTnLst>
+                              <p:par>
+                                <p:cTn id="9" presetID="1" presetClass="entr" presetSubtype="0" fill="hold" grpId="0" nodeType="clickEffect">
+                                  <p:stCondLst>
+                                    <p:cond delay="0"/>
+                                  </p:stCondLst>
+                                  <p:childTnLst>
+                                    <p:set>
+                                      <p:cBhvr>
+                                        <p:cTn id="10" dur="1" fill="hold">
+                                          <p:stCondLst>
+                                            <p:cond delay="0"/>
+                                          </p:stCondLst>
+                                        </p:cTn>
+                                        <p:tgtEl>
+                                          <p:spTgt spid="3">
+                                            <p:txEl>
+                                              <p:pRg st="2" end="2"/>
+                                            </p:txEl>
+                                          </p:spTgt>
+                                        </p:tgtEl>
+                                        <p:attrNameLst>
+                                          <p:attrName>style.visibility</p:attrName>
+                                        </p:attrNameLst>
+                                      </p:cBhvr>
+                                      <p:to>
+                                        <p:strVal val="visible"/>
+                                      </p:to>
+                                    </p:set>
+                                  </p:childTnLst>
+                                </p:cTn>
+                              </p:par>
+                            </p:childTnLst>
+                          </p:cTn>
+                        </p:par>
+                      </p:childTnLst>
+                    </p:cTn>
+                  </p:par>
+                  <p:par>
+                    <p:cTn id="11" fill="hold">
+                      <p:stCondLst>
+                        <p:cond delay="indefinite"/>
+                      </p:stCondLst>
+                      <p:childTnLst>
+                        <p:par>
+                          <p:cTn id="12" fill="hold">
+                            <p:stCondLst>
+                              <p:cond delay="0"/>
+                            </p:stCondLst>
+                            <p:childTnLst>
+                              <p:par>
+                                <p:cTn id="13" presetID="1" presetClass="entr" presetSubtype="0" fill="hold" grpId="0" nodeType="clickEffect">
+                                  <p:stCondLst>
+                                    <p:cond delay="0"/>
+                                  </p:stCondLst>
+                                  <p:childTnLst>
+                                    <p:set>
+                                      <p:cBhvr>
+                                        <p:cTn id="14" dur="1" fill="hold">
+                                          <p:stCondLst>
+                                            <p:cond delay="0"/>
+                                          </p:stCondLst>
+                                        </p:cTn>
+                                        <p:tgtEl>
+                                          <p:spTgt spid="3">
+                                            <p:txEl>
+                                              <p:pRg st="4" end="4"/>
+                                            </p:txEl>
+                                          </p:spTgt>
+                                        </p:tgtEl>
+                                        <p:attrNameLst>
+                                          <p:attrName>style.visibility</p:attrName>
+                                        </p:attrNameLst>
+                                      </p:cBhvr>
+                                      <p:to>
+                                        <p:strVal val="visible"/>
+                                      </p:to>
+                                    </p:set>
+                                  </p:childTnLst>
+                                </p:cTn>
+                              </p:par>
+                            </p:childTnLst>
+                          </p:cTn>
+                        </p:par>
+                      </p:childTnLst>
+                    </p:cTn>
+                  </p:par>
+                  <p:par>
+                    <p:cTn id="15" fill="hold">
+                      <p:stCondLst>
+                        <p:cond delay="indefinite"/>
+                      </p:stCondLst>
+                      <p:childTnLst>
+                        <p:par>
+                          <p:cTn id="16" fill="hold">
+                            <p:stCondLst>
+                              <p:cond delay="0"/>
+                            </p:stCondLst>
+                            <p:childTnLst>
+                              <p:par>
+                                <p:cTn id="17" presetID="1" presetClass="entr" presetSubtype="0" fill="hold" grpId="0" nodeType="clickEffect">
+                                  <p:stCondLst>
+                                    <p:cond delay="0"/>
+                                  </p:stCondLst>
+                                  <p:childTnLst>
+                                    <p:set>
+                                      <p:cBhvr>
+                                        <p:cTn id="18" dur="1" fill="hold">
+                                          <p:stCondLst>
+                                            <p:cond delay="0"/>
+                                          </p:stCondLst>
+                                        </p:cTn>
+                                        <p:tgtEl>
+                                          <p:spTgt spid="3">
+                                            <p:txEl>
+                                              <p:pRg st="6" end="6"/>
+                                            </p:txEl>
+                                          </p:spTgt>
+                                        </p:tgtEl>
+                                        <p:attrNameLst>
+                                          <p:attrName>style.visibility</p:attrName>
+                                        </p:attrNameLst>
+                                      </p:cBhvr>
+                                      <p:to>
+                                        <p:strVal val="visible"/>
+                                      </p:to>
+                                    </p:set>
+                                  </p:childTnLst>
+                                </p:cTn>
+                              </p:par>
+                            </p:childTnLst>
+                          </p:cTn>
+                        </p:par>
+                      </p:childTnLst>
+                    </p:cTn>
+                  </p:par>
+                </p:childTnLst>
+              </p:cTn>
+              <p:prevCondLst>
+                <p:cond evt="onPrev" delay="0">
+                  <p:tgtEl>
+                    <p:sldTgt/>
+                  </p:tgtEl>
+                </p:cond>
+              </p:prevCondLst>
+              <p:nextCondLst>
+                <p:cond evt="onNext" delay="0">
+                  <p:tgtEl>
+                    <p:sldTgt/>
+                  </p:tgtEl>
+                </p:cond>
+              </p:nextCondLst>
+            </p:seq>
+          </p:childTnLst>
+        </p:cTn>
+      </p:par>
+    </p:tnLst>
+    <p:bldLst>
+      <p:bldP spid="3" grpId="0" build="p"/>
+    </p:bldLst>
+  </p:timing>
 </p:sld>
 </file>
 
@@ -16834,6 +17361,24 @@
 </file>
 
 <file path=ppt/tags/tag6.xml><?xml version="1.0" encoding="utf-8"?>
+<p:tagLst xmlns:a="http://schemas.openxmlformats.org/drawingml/2006/main" xmlns:r="http://schemas.openxmlformats.org/officeDocument/2006/relationships" xmlns:p="http://schemas.openxmlformats.org/presentationml/2006/main">
+  <p:tag name="DVSHAPEID" val="9GXR3BK6E2EUKvoPmRUH3b"/>
+</p:tagLst>
+</file>
+
+<file path=ppt/tags/tag7.xml><?xml version="1.0" encoding="utf-8"?>
+<p:tagLst xmlns:a="http://schemas.openxmlformats.org/drawingml/2006/main" xmlns:r="http://schemas.openxmlformats.org/officeDocument/2006/relationships" xmlns:p="http://schemas.openxmlformats.org/presentationml/2006/main">
+  <p:tag name="DVSECTIONID" val="ULJKTtTuA1JYcmiIHNUWnZ"/>
+</p:tagLst>
+</file>
+
+<file path=ppt/tags/tag8.xml><?xml version="1.0" encoding="utf-8"?>
+<p:tagLst xmlns:a="http://schemas.openxmlformats.org/drawingml/2006/main" xmlns:r="http://schemas.openxmlformats.org/officeDocument/2006/relationships" xmlns:p="http://schemas.openxmlformats.org/presentationml/2006/main">
+  <p:tag name="DVSHAPEID" val="0el361ATYxVn7CIhxUw3rP"/>
+</p:tagLst>
+</file>
+
+<file path=ppt/tags/tag9.xml><?xml version="1.0" encoding="utf-8"?>
 <p:tagLst xmlns:a="http://schemas.openxmlformats.org/drawingml/2006/main" xmlns:r="http://schemas.openxmlformats.org/officeDocument/2006/relationships" xmlns:p="http://schemas.openxmlformats.org/presentationml/2006/main">
   <p:tag name="DVSHAPEID" val="9GXR3BK6E2EUKvoPmRUH3b"/>
 </p:tagLst>
